--- a/assets/figures-editable/c3-c4/c4-e37.pptx
+++ b/assets/figures-editable/c3-c4/c4-e37.pptx
@@ -3104,8 +3104,8 @@
         </p:nvSpPr>
         <p:spPr>
           <a:xfrm>
-            <a:off x="274320" y="137160"/>
-            <a:ext cx="11612880" cy="365760"/>
+            <a:off x="274320" y="118872"/>
+            <a:ext cx="11612880" cy="340105"/>
           </a:xfrm>
           <a:prstGeom prst="rect">
             <a:avLst/>
@@ -3114,7 +3114,7 @@
           <a:effectLst/>
         </p:spPr>
         <p:txBody>
-          <a:bodyPr wrap="square" lIns="27432" rIns="27432" tIns="18288" bIns="18288" anchor="ctr">
+          <a:bodyPr wrap="none" lIns="18288" rIns="18288" tIns="18288" bIns="18288" anchor="t">
             <a:spAutoFit/>
           </a:bodyPr>
           <a:lstStyle/>
@@ -3125,7 +3125,7 @@
               </a:spcAft>
             </a:pPr>
             <a:r>
-              <a:rPr sz="2100" b="0" i="0">
+              <a:rPr sz="1900" b="1" i="0">
                 <a:solidFill>
                   <a:srgbClr val="8EDBD4"/>
                 </a:solidFill>
@@ -3144,13 +3144,13 @@
         </p:nvCxnSpPr>
         <p:spPr>
           <a:xfrm>
-            <a:off x="731520" y="2880360"/>
-            <a:ext cx="6675120" cy="0"/>
+            <a:off x="914400" y="4846320"/>
+            <a:ext cx="4389120" cy="0"/>
           </a:xfrm>
           <a:prstGeom prst="line">
             <a:avLst/>
           </a:prstGeom>
-          <a:ln w="25400">
+          <a:ln w="19050">
             <a:solidFill>
               <a:srgbClr val="B4C7D2"/>
             </a:solidFill>
@@ -3165,16 +3165,16 @@
           <p:nvPr/>
         </p:nvCxnSpPr>
         <p:spPr>
-          <a:xfrm flipV="1">
-            <a:off x="1005840" y="2876570"/>
-            <a:ext cx="76581" cy="3790"/>
+          <a:xfrm>
+            <a:off x="914400" y="1371600"/>
+            <a:ext cx="0" cy="3474720"/>
           </a:xfrm>
           <a:prstGeom prst="line">
             <a:avLst/>
           </a:prstGeom>
-          <a:ln w="25400">
+          <a:ln w="19050">
             <a:solidFill>
-              <a:srgbClr val="8EDBD4"/>
+              <a:srgbClr val="B4C7D2"/>
             </a:solidFill>
           </a:ln>
           <a:effectLst/>
@@ -3187,16 +3187,16 @@
           <p:nvPr/>
         </p:nvCxnSpPr>
         <p:spPr>
-          <a:xfrm flipV="1">
-            <a:off x="1082421" y="2865582"/>
-            <a:ext cx="76581" cy="10988"/>
+          <a:xfrm>
+            <a:off x="914400" y="4846320"/>
+            <a:ext cx="0" cy="64008"/>
           </a:xfrm>
           <a:prstGeom prst="line">
             <a:avLst/>
           </a:prstGeom>
-          <a:ln w="25400">
+          <a:ln w="12700">
             <a:solidFill>
-              <a:srgbClr val="8EDBD4"/>
+              <a:srgbClr val="B4C7D2"/>
             </a:solidFill>
           </a:ln>
           <a:effectLst/>
@@ -3209,43 +3209,61 @@
           <p:nvPr/>
         </p:nvCxnSpPr>
         <p:spPr>
-          <a:xfrm flipV="1">
-            <a:off x="1159002" y="2847958"/>
-            <a:ext cx="76581" cy="17624"/>
+          <a:xfrm>
+            <a:off x="914400" y="1371600"/>
+            <a:ext cx="0" cy="3474720"/>
           </a:xfrm>
           <a:prstGeom prst="line">
             <a:avLst/>
           </a:prstGeom>
-          <a:ln w="25400">
+          <a:ln w="7620">
             <a:solidFill>
-              <a:srgbClr val="8EDBD4"/>
+              <a:srgbClr val="2E4756"/>
             </a:solidFill>
           </a:ln>
           <a:effectLst/>
         </p:spPr>
       </p:cxnSp>
-      <p:cxnSp>
-        <p:nvCxnSpPr>
-          <p:cNvPr id="7" name="C4-E37 line 5" descr="sci-ppt:o005"/>
-          <p:cNvCxnSpPr/>
+      <p:sp>
+        <p:nvSpPr>
+          <p:cNvPr id="7" name="C4-E37 text 5" descr="sci-ppt:o005"/>
+          <p:cNvSpPr txBox="1"/>
           <p:nvPr/>
-        </p:nvCxnSpPr>
-        <p:spPr>
-          <a:xfrm flipV="1">
-            <a:off x="1235583" y="2824243"/>
-            <a:ext cx="76581" cy="23715"/>
-          </a:xfrm>
-          <a:prstGeom prst="line">
+        </p:nvSpPr>
+        <p:spPr>
+          <a:xfrm>
+            <a:off x="457200" y="4928616"/>
+            <a:ext cx="914400" cy="208407"/>
+          </a:xfrm>
+          <a:prstGeom prst="rect">
             <a:avLst/>
           </a:prstGeom>
-          <a:ln w="25400">
-            <a:solidFill>
-              <a:srgbClr val="8EDBD4"/>
-            </a:solidFill>
-          </a:ln>
+          <a:noFill/>
           <a:effectLst/>
         </p:spPr>
-      </p:cxnSp>
+        <p:txBody>
+          <a:bodyPr wrap="none" lIns="18288" rIns="18288" tIns="18288" bIns="18288" anchor="t">
+            <a:spAutoFit/>
+          </a:bodyPr>
+          <a:lstStyle/>
+          <a:p>
+            <a:pPr algn="ctr">
+              <a:spcAft>
+                <a:spcPts val="0"/>
+              </a:spcAft>
+            </a:pPr>
+            <a:r>
+              <a:rPr sz="1050" b="0" i="0">
+                <a:solidFill>
+                  <a:srgbClr val="B4C7D2"/>
+                </a:solidFill>
+                <a:latin typeface="Arial"/>
+              </a:rPr>
+              <a:t>0</a:t>
+            </a:r>
+          </a:p>
+        </p:txBody>
+      </p:sp>
       <p:cxnSp>
         <p:nvCxnSpPr>
           <p:cNvPr id="8" name="C4-E37 line 6" descr="sci-ppt:o006"/>
@@ -3253,16 +3271,16 @@
           <p:nvPr/>
         </p:nvCxnSpPr>
         <p:spPr>
-          <a:xfrm flipV="1">
-            <a:off x="1312164" y="2794969"/>
-            <a:ext cx="76581" cy="29274"/>
+          <a:xfrm>
+            <a:off x="3108960" y="4846320"/>
+            <a:ext cx="0" cy="64008"/>
           </a:xfrm>
           <a:prstGeom prst="line">
             <a:avLst/>
           </a:prstGeom>
-          <a:ln w="25400">
+          <a:ln w="12700">
             <a:solidFill>
-              <a:srgbClr val="8EDBD4"/>
+              <a:srgbClr val="B4C7D2"/>
             </a:solidFill>
           </a:ln>
           <a:effectLst/>
@@ -3275,43 +3293,61 @@
           <p:nvPr/>
         </p:nvCxnSpPr>
         <p:spPr>
-          <a:xfrm flipV="1">
-            <a:off x="1388745" y="2760655"/>
-            <a:ext cx="76581" cy="34314"/>
+          <a:xfrm>
+            <a:off x="3108960" y="1371600"/>
+            <a:ext cx="0" cy="3474720"/>
           </a:xfrm>
           <a:prstGeom prst="line">
             <a:avLst/>
           </a:prstGeom>
-          <a:ln w="25400">
+          <a:ln w="7620">
             <a:solidFill>
-              <a:srgbClr val="8EDBD4"/>
+              <a:srgbClr val="2E4756"/>
             </a:solidFill>
           </a:ln>
           <a:effectLst/>
         </p:spPr>
       </p:cxnSp>
-      <p:cxnSp>
-        <p:nvCxnSpPr>
-          <p:cNvPr id="10" name="C4-E37 line 8" descr="sci-ppt:o008"/>
-          <p:cNvCxnSpPr/>
+      <p:sp>
+        <p:nvSpPr>
+          <p:cNvPr id="10" name="C4-E37 text 8" descr="sci-ppt:o008"/>
+          <p:cNvSpPr txBox="1"/>
           <p:nvPr/>
-        </p:nvCxnSpPr>
-        <p:spPr>
-          <a:xfrm flipV="1">
-            <a:off x="1465326" y="2721802"/>
-            <a:ext cx="76581" cy="38853"/>
-          </a:xfrm>
-          <a:prstGeom prst="line">
+        </p:nvSpPr>
+        <p:spPr>
+          <a:xfrm>
+            <a:off x="2651760" y="4928616"/>
+            <a:ext cx="914400" cy="208407"/>
+          </a:xfrm>
+          <a:prstGeom prst="rect">
             <a:avLst/>
           </a:prstGeom>
-          <a:ln w="25400">
-            <a:solidFill>
-              <a:srgbClr val="8EDBD4"/>
-            </a:solidFill>
-          </a:ln>
+          <a:noFill/>
           <a:effectLst/>
         </p:spPr>
-      </p:cxnSp>
+        <p:txBody>
+          <a:bodyPr wrap="none" lIns="18288" rIns="18288" tIns="18288" bIns="18288" anchor="t">
+            <a:spAutoFit/>
+          </a:bodyPr>
+          <a:lstStyle/>
+          <a:p>
+            <a:pPr algn="ctr">
+              <a:spcAft>
+                <a:spcPts val="0"/>
+              </a:spcAft>
+            </a:pPr>
+            <a:r>
+              <a:rPr sz="1050" b="0" i="0">
+                <a:solidFill>
+                  <a:srgbClr val="B4C7D2"/>
+                </a:solidFill>
+                <a:latin typeface="Arial"/>
+              </a:rPr>
+              <a:t>0.5</a:t>
+            </a:r>
+          </a:p>
+        </p:txBody>
+      </p:sp>
       <p:cxnSp>
         <p:nvCxnSpPr>
           <p:cNvPr id="11" name="C4-E37 line 9" descr="sci-ppt:o009"/>
@@ -3319,16 +3355,16 @@
           <p:nvPr/>
         </p:nvCxnSpPr>
         <p:spPr>
-          <a:xfrm flipV="1">
-            <a:off x="1541907" y="2678899"/>
-            <a:ext cx="76581" cy="42903"/>
+          <a:xfrm>
+            <a:off x="5303520" y="4846320"/>
+            <a:ext cx="0" cy="64008"/>
           </a:xfrm>
           <a:prstGeom prst="line">
             <a:avLst/>
           </a:prstGeom>
-          <a:ln w="25400">
+          <a:ln w="12700">
             <a:solidFill>
-              <a:srgbClr val="8EDBD4"/>
+              <a:srgbClr val="B4C7D2"/>
             </a:solidFill>
           </a:ln>
           <a:effectLst/>
@@ -3341,43 +3377,61 @@
           <p:nvPr/>
         </p:nvCxnSpPr>
         <p:spPr>
-          <a:xfrm flipV="1">
-            <a:off x="1618488" y="2632419"/>
-            <a:ext cx="76581" cy="46480"/>
+          <a:xfrm>
+            <a:off x="5303520" y="1371600"/>
+            <a:ext cx="0" cy="3474720"/>
           </a:xfrm>
           <a:prstGeom prst="line">
             <a:avLst/>
           </a:prstGeom>
-          <a:ln w="25400">
+          <a:ln w="7620">
             <a:solidFill>
-              <a:srgbClr val="8EDBD4"/>
+              <a:srgbClr val="2E4756"/>
             </a:solidFill>
           </a:ln>
           <a:effectLst/>
         </p:spPr>
       </p:cxnSp>
-      <p:cxnSp>
-        <p:nvCxnSpPr>
-          <p:cNvPr id="13" name="C4-E37 line 11" descr="sci-ppt:o011"/>
-          <p:cNvCxnSpPr/>
+      <p:sp>
+        <p:nvSpPr>
+          <p:cNvPr id="13" name="C4-E37 text 11" descr="sci-ppt:o011"/>
+          <p:cNvSpPr txBox="1"/>
           <p:nvPr/>
-        </p:nvCxnSpPr>
-        <p:spPr>
-          <a:xfrm flipV="1">
-            <a:off x="1695069" y="2582822"/>
-            <a:ext cx="76581" cy="49597"/>
-          </a:xfrm>
-          <a:prstGeom prst="line">
+        </p:nvSpPr>
+        <p:spPr>
+          <a:xfrm>
+            <a:off x="4846320" y="4928616"/>
+            <a:ext cx="914400" cy="208407"/>
+          </a:xfrm>
+          <a:prstGeom prst="rect">
             <a:avLst/>
           </a:prstGeom>
-          <a:ln w="25400">
-            <a:solidFill>
-              <a:srgbClr val="8EDBD4"/>
-            </a:solidFill>
-          </a:ln>
+          <a:noFill/>
           <a:effectLst/>
         </p:spPr>
-      </p:cxnSp>
+        <p:txBody>
+          <a:bodyPr wrap="none" lIns="18288" rIns="18288" tIns="18288" bIns="18288" anchor="t">
+            <a:spAutoFit/>
+          </a:bodyPr>
+          <a:lstStyle/>
+          <a:p>
+            <a:pPr algn="ctr">
+              <a:spcAft>
+                <a:spcPts val="0"/>
+              </a:spcAft>
+            </a:pPr>
+            <a:r>
+              <a:rPr sz="1050" b="0" i="0">
+                <a:solidFill>
+                  <a:srgbClr val="B4C7D2"/>
+                </a:solidFill>
+                <a:latin typeface="Arial"/>
+              </a:rPr>
+              <a:t>1</a:t>
+            </a:r>
+          </a:p>
+        </p:txBody>
+      </p:sp>
       <p:cxnSp>
         <p:nvCxnSpPr>
           <p:cNvPr id="14" name="C4-E37 line 12" descr="sci-ppt:o012"/>
@@ -3385,16 +3439,16 @@
           <p:nvPr/>
         </p:nvCxnSpPr>
         <p:spPr>
-          <a:xfrm flipV="1">
-            <a:off x="1771650" y="2530552"/>
-            <a:ext cx="76581" cy="52270"/>
+          <a:xfrm>
+            <a:off x="850392" y="4846320"/>
+            <a:ext cx="64008" cy="0"/>
           </a:xfrm>
           <a:prstGeom prst="line">
             <a:avLst/>
           </a:prstGeom>
-          <a:ln w="25400">
+          <a:ln w="12700">
             <a:solidFill>
-              <a:srgbClr val="8EDBD4"/>
+              <a:srgbClr val="B4C7D2"/>
             </a:solidFill>
           </a:ln>
           <a:effectLst/>
@@ -3407,16 +3461,16 @@
           <p:nvPr/>
         </p:nvCxnSpPr>
         <p:spPr>
-          <a:xfrm flipV="1">
-            <a:off x="1848231" y="2476039"/>
-            <a:ext cx="76581" cy="54513"/>
+          <a:xfrm>
+            <a:off x="850392" y="3266901"/>
+            <a:ext cx="64008" cy="0"/>
           </a:xfrm>
           <a:prstGeom prst="line">
             <a:avLst/>
           </a:prstGeom>
-          <a:ln w="25400">
+          <a:ln w="12700">
             <a:solidFill>
-              <a:srgbClr val="8EDBD4"/>
+              <a:srgbClr val="B4C7D2"/>
             </a:solidFill>
           </a:ln>
           <a:effectLst/>
@@ -3429,43 +3483,61 @@
           <p:nvPr/>
         </p:nvCxnSpPr>
         <p:spPr>
-          <a:xfrm flipV="1">
-            <a:off x="1924812" y="2419698"/>
-            <a:ext cx="76581" cy="56341"/>
+          <a:xfrm>
+            <a:off x="914400" y="3266901"/>
+            <a:ext cx="4389120" cy="0"/>
           </a:xfrm>
           <a:prstGeom prst="line">
             <a:avLst/>
           </a:prstGeom>
-          <a:ln w="25400">
+          <a:ln w="7620">
             <a:solidFill>
-              <a:srgbClr val="8EDBD4"/>
+              <a:srgbClr val="2E4756"/>
             </a:solidFill>
           </a:ln>
           <a:effectLst/>
         </p:spPr>
       </p:cxnSp>
-      <p:cxnSp>
-        <p:nvCxnSpPr>
-          <p:cNvPr id="17" name="C4-E37 line 15" descr="sci-ppt:o015"/>
-          <p:cNvCxnSpPr/>
+      <p:sp>
+        <p:nvSpPr>
+          <p:cNvPr id="17" name="C4-E37 text 15" descr="sci-ppt:o015"/>
+          <p:cNvSpPr txBox="1"/>
           <p:nvPr/>
-        </p:nvCxnSpPr>
-        <p:spPr>
-          <a:xfrm flipV="1">
-            <a:off x="2001393" y="2361931"/>
-            <a:ext cx="76581" cy="57767"/>
-          </a:xfrm>
-          <a:prstGeom prst="line">
+        </p:nvSpPr>
+        <p:spPr>
+          <a:xfrm>
+            <a:off x="45720" y="3184605"/>
+            <a:ext cx="777240" cy="208407"/>
+          </a:xfrm>
+          <a:prstGeom prst="rect">
             <a:avLst/>
           </a:prstGeom>
-          <a:ln w="25400">
-            <a:solidFill>
-              <a:srgbClr val="8EDBD4"/>
-            </a:solidFill>
-          </a:ln>
+          <a:noFill/>
           <a:effectLst/>
         </p:spPr>
-      </p:cxnSp>
+        <p:txBody>
+          <a:bodyPr wrap="none" lIns="18288" rIns="18288" tIns="18288" bIns="18288" anchor="t">
+            <a:spAutoFit/>
+          </a:bodyPr>
+          <a:lstStyle/>
+          <a:p>
+            <a:pPr algn="r">
+              <a:spcAft>
+                <a:spcPts val="0"/>
+              </a:spcAft>
+            </a:pPr>
+            <a:r>
+              <a:rPr sz="1050" b="0" i="0">
+                <a:solidFill>
+                  <a:srgbClr val="B4C7D2"/>
+                </a:solidFill>
+                <a:latin typeface="Arial"/>
+              </a:rPr>
+              <a:t>0.5</a:t>
+            </a:r>
+          </a:p>
+        </p:txBody>
+      </p:sp>
       <p:cxnSp>
         <p:nvCxnSpPr>
           <p:cNvPr id="18" name="C4-E37 line 16" descr="sci-ppt:o016"/>
@@ -3473,16 +3545,16 @@
           <p:nvPr/>
         </p:nvCxnSpPr>
         <p:spPr>
-          <a:xfrm flipV="1">
-            <a:off x="2077974" y="2303122"/>
-            <a:ext cx="76581" cy="58809"/>
+          <a:xfrm>
+            <a:off x="850392" y="1687483"/>
+            <a:ext cx="64008" cy="0"/>
           </a:xfrm>
           <a:prstGeom prst="line">
             <a:avLst/>
           </a:prstGeom>
-          <a:ln w="25400">
+          <a:ln w="12700">
             <a:solidFill>
-              <a:srgbClr val="8EDBD4"/>
+              <a:srgbClr val="B4C7D2"/>
             </a:solidFill>
           </a:ln>
           <a:effectLst/>
@@ -3495,109 +3567,479 @@
           <p:nvPr/>
         </p:nvCxnSpPr>
         <p:spPr>
-          <a:xfrm flipV="1">
-            <a:off x="2154555" y="2243644"/>
-            <a:ext cx="76581" cy="59478"/>
+          <a:xfrm>
+            <a:off x="914400" y="1687483"/>
+            <a:ext cx="4389120" cy="0"/>
           </a:xfrm>
           <a:prstGeom prst="line">
             <a:avLst/>
           </a:prstGeom>
-          <a:ln w="25400">
+          <a:ln w="7620">
+            <a:solidFill>
+              <a:srgbClr val="2E4756"/>
+            </a:solidFill>
+          </a:ln>
+          <a:effectLst/>
+        </p:spPr>
+      </p:cxnSp>
+      <p:sp>
+        <p:nvSpPr>
+          <p:cNvPr id="20" name="C4-E37 text 18" descr="sci-ppt:o018"/>
+          <p:cNvSpPr txBox="1"/>
+          <p:nvPr/>
+        </p:nvSpPr>
+        <p:spPr>
+          <a:xfrm>
+            <a:off x="45720" y="1605187"/>
+            <a:ext cx="777240" cy="208407"/>
+          </a:xfrm>
+          <a:prstGeom prst="rect">
+            <a:avLst/>
+          </a:prstGeom>
+          <a:noFill/>
+          <a:effectLst/>
+        </p:spPr>
+        <p:txBody>
+          <a:bodyPr wrap="none" lIns="18288" rIns="18288" tIns="18288" bIns="18288" anchor="t">
+            <a:spAutoFit/>
+          </a:bodyPr>
+          <a:lstStyle/>
+          <a:p>
+            <a:pPr algn="r">
+              <a:spcAft>
+                <a:spcPts val="0"/>
+              </a:spcAft>
+            </a:pPr>
+            <a:r>
+              <a:rPr sz="1050" b="0" i="0">
+                <a:solidFill>
+                  <a:srgbClr val="B4C7D2"/>
+                </a:solidFill>
+                <a:latin typeface="Arial"/>
+              </a:rPr>
+              <a:t>1</a:t>
+            </a:r>
+          </a:p>
+        </p:txBody>
+      </p:sp>
+      <p:sp>
+        <p:nvSpPr>
+          <p:cNvPr id="21" name="C4-E37 text 19" descr="sci-ppt:o019"/>
+          <p:cNvSpPr txBox="1"/>
+          <p:nvPr/>
+        </p:nvSpPr>
+        <p:spPr>
+          <a:xfrm>
+            <a:off x="914400" y="5129783"/>
+            <a:ext cx="4389120" cy="231648"/>
+          </a:xfrm>
+          <a:prstGeom prst="rect">
+            <a:avLst/>
+          </a:prstGeom>
+          <a:noFill/>
+          <a:effectLst/>
+        </p:spPr>
+        <p:txBody>
+          <a:bodyPr wrap="none" lIns="18288" rIns="18288" tIns="18288" bIns="18288" anchor="t">
+            <a:spAutoFit/>
+          </a:bodyPr>
+          <a:lstStyle/>
+          <a:p>
+            <a:pPr algn="ctr">
+              <a:spcAft>
+                <a:spcPts val="0"/>
+              </a:spcAft>
+            </a:pPr>
+            <a:r>
+              <a:rPr sz="1200" b="0" i="0">
+                <a:solidFill>
+                  <a:srgbClr val="E7F0F3"/>
+                </a:solidFill>
+                <a:latin typeface="Arial"/>
+              </a:rPr>
+              <a:t>r / b</a:t>
+            </a:r>
+          </a:p>
+        </p:txBody>
+      </p:sp>
+      <p:sp>
+        <p:nvSpPr>
+          <p:cNvPr id="22" name="C4-E37 text 20" descr="sci-ppt:o020"/>
+          <p:cNvSpPr txBox="1"/>
+          <p:nvPr/>
+        </p:nvSpPr>
+        <p:spPr>
+          <a:xfrm>
+            <a:off x="365760" y="1024128"/>
+            <a:ext cx="4389120" cy="231648"/>
+          </a:xfrm>
+          <a:prstGeom prst="rect">
+            <a:avLst/>
+          </a:prstGeom>
+          <a:noFill/>
+          <a:effectLst/>
+        </p:spPr>
+        <p:txBody>
+          <a:bodyPr wrap="none" lIns="18288" rIns="18288" tIns="18288" bIns="18288" anchor="t">
+            <a:spAutoFit/>
+          </a:bodyPr>
+          <a:lstStyle/>
+          <a:p>
+            <a:pPr algn="l">
+              <a:spcAft>
+                <a:spcPts val="0"/>
+              </a:spcAft>
+            </a:pPr>
+            <a:r>
+              <a:rPr sz="1200" b="0" i="0">
+                <a:solidFill>
+                  <a:srgbClr val="E7F0F3"/>
+                </a:solidFill>
+                <a:latin typeface="Arial"/>
+              </a:rPr>
+              <a:t>w / w(0)</a:t>
+            </a:r>
+          </a:p>
+        </p:txBody>
+      </p:sp>
+      <p:sp>
+        <p:nvSpPr>
+          <p:cNvPr id="23" name="C4-E37 polygon 21" descr="sci-ppt:o021"/>
+          <p:cNvSpPr/>
+          <p:nvPr/>
+        </p:nvSpPr>
+        <p:spPr>
+          <a:xfrm>
+            <a:off x="914400" y="1687483"/>
+            <a:ext cx="4389120" cy="3158837"/>
+          </a:xfrm>
+          <a:custGeom>
+            <a:avLst/>
+            <a:gdLst/>
+            <a:ahLst/>
+            <a:cxnLst/>
+            <a:rect l="l" t="t" r="r" b="b"/>
+            <a:pathLst>
+              <a:path w="4389120" h="3158837">
+                <a:moveTo>
+                  <a:pt x="0" y="0"/>
+                </a:moveTo>
+                <a:lnTo>
+                  <a:pt x="44334" y="645"/>
+                </a:lnTo>
+                <a:lnTo>
+                  <a:pt x="88669" y="2578"/>
+                </a:lnTo>
+                <a:lnTo>
+                  <a:pt x="133003" y="5799"/>
+                </a:lnTo>
+                <a:lnTo>
+                  <a:pt x="177338" y="10305"/>
+                </a:lnTo>
+                <a:lnTo>
+                  <a:pt x="221672" y="16094"/>
+                </a:lnTo>
+                <a:lnTo>
+                  <a:pt x="266007" y="23163"/>
+                </a:lnTo>
+                <a:lnTo>
+                  <a:pt x="310341" y="31506"/>
+                </a:lnTo>
+                <a:lnTo>
+                  <a:pt x="354676" y="41120"/>
+                </a:lnTo>
+                <a:lnTo>
+                  <a:pt x="399010" y="51997"/>
+                </a:lnTo>
+                <a:lnTo>
+                  <a:pt x="443345" y="64131"/>
+                </a:lnTo>
+                <a:lnTo>
+                  <a:pt x="487680" y="77515"/>
+                </a:lnTo>
+                <a:lnTo>
+                  <a:pt x="532014" y="92140"/>
+                </a:lnTo>
+                <a:lnTo>
+                  <a:pt x="576349" y="107997"/>
+                </a:lnTo>
+                <a:lnTo>
+                  <a:pt x="620683" y="125077"/>
+                </a:lnTo>
+                <a:lnTo>
+                  <a:pt x="665018" y="143369"/>
+                </a:lnTo>
+                <a:lnTo>
+                  <a:pt x="709352" y="162861"/>
+                </a:lnTo>
+                <a:lnTo>
+                  <a:pt x="753687" y="183541"/>
+                </a:lnTo>
+                <a:lnTo>
+                  <a:pt x="798021" y="205397"/>
+                </a:lnTo>
+                <a:lnTo>
+                  <a:pt x="842356" y="228413"/>
+                </a:lnTo>
+                <a:lnTo>
+                  <a:pt x="886690" y="252577"/>
+                </a:lnTo>
+                <a:lnTo>
+                  <a:pt x="931025" y="277871"/>
+                </a:lnTo>
+                <a:lnTo>
+                  <a:pt x="975359" y="304281"/>
+                </a:lnTo>
+                <a:lnTo>
+                  <a:pt x="1019694" y="331788"/>
+                </a:lnTo>
+                <a:lnTo>
+                  <a:pt x="1064029" y="360377"/>
+                </a:lnTo>
+                <a:lnTo>
+                  <a:pt x="1108363" y="390026"/>
+                </a:lnTo>
+                <a:lnTo>
+                  <a:pt x="1152698" y="420719"/>
+                </a:lnTo>
+                <a:lnTo>
+                  <a:pt x="1197032" y="452434"/>
+                </a:lnTo>
+                <a:lnTo>
+                  <a:pt x="1241367" y="485150"/>
+                </a:lnTo>
+                <a:lnTo>
+                  <a:pt x="1285701" y="518846"/>
+                </a:lnTo>
+                <a:lnTo>
+                  <a:pt x="1330036" y="553499"/>
+                </a:lnTo>
+                <a:lnTo>
+                  <a:pt x="1374370" y="589086"/>
+                </a:lnTo>
+                <a:lnTo>
+                  <a:pt x="1418705" y="625584"/>
+                </a:lnTo>
+                <a:lnTo>
+                  <a:pt x="1463040" y="662966"/>
+                </a:lnTo>
+                <a:lnTo>
+                  <a:pt x="1507374" y="701207"/>
+                </a:lnTo>
+                <a:lnTo>
+                  <a:pt x="1551709" y="740282"/>
+                </a:lnTo>
+                <a:lnTo>
+                  <a:pt x="1596043" y="780162"/>
+                </a:lnTo>
+                <a:lnTo>
+                  <a:pt x="1640378" y="820820"/>
+                </a:lnTo>
+                <a:lnTo>
+                  <a:pt x="1684712" y="862227"/>
+                </a:lnTo>
+                <a:lnTo>
+                  <a:pt x="1729047" y="904353"/>
+                </a:lnTo>
+                <a:lnTo>
+                  <a:pt x="1773381" y="947168"/>
+                </a:lnTo>
+                <a:lnTo>
+                  <a:pt x="1817716" y="990641"/>
+                </a:lnTo>
+                <a:lnTo>
+                  <a:pt x="1862050" y="1034740"/>
+                </a:lnTo>
+                <a:lnTo>
+                  <a:pt x="1906385" y="1079431"/>
+                </a:lnTo>
+                <a:lnTo>
+                  <a:pt x="1950720" y="1124683"/>
+                </a:lnTo>
+                <a:lnTo>
+                  <a:pt x="1995054" y="1170459"/>
+                </a:lnTo>
+                <a:lnTo>
+                  <a:pt x="2039389" y="1216725"/>
+                </a:lnTo>
+                <a:lnTo>
+                  <a:pt x="2083723" y="1263446"/>
+                </a:lnTo>
+                <a:lnTo>
+                  <a:pt x="2128058" y="1310584"/>
+                </a:lnTo>
+                <a:lnTo>
+                  <a:pt x="2172392" y="1358102"/>
+                </a:lnTo>
+                <a:lnTo>
+                  <a:pt x="2216727" y="1405961"/>
+                </a:lnTo>
+                <a:lnTo>
+                  <a:pt x="2261061" y="1454123"/>
+                </a:lnTo>
+                <a:lnTo>
+                  <a:pt x="2305396" y="1502548"/>
+                </a:lnTo>
+                <a:lnTo>
+                  <a:pt x="2349730" y="1551195"/>
+                </a:lnTo>
+                <a:lnTo>
+                  <a:pt x="2394065" y="1600023"/>
+                </a:lnTo>
+                <a:lnTo>
+                  <a:pt x="2438400" y="1648989"/>
+                </a:lnTo>
+                <a:lnTo>
+                  <a:pt x="2482734" y="1698050"/>
+                </a:lnTo>
+                <a:lnTo>
+                  <a:pt x="2527069" y="1747163"/>
+                </a:lnTo>
+                <a:lnTo>
+                  <a:pt x="2571403" y="1796284"/>
+                </a:lnTo>
+                <a:lnTo>
+                  <a:pt x="2615738" y="1845365"/>
+                </a:lnTo>
+                <a:lnTo>
+                  <a:pt x="2660072" y="1894363"/>
+                </a:lnTo>
+                <a:lnTo>
+                  <a:pt x="2704407" y="1943229"/>
+                </a:lnTo>
+                <a:lnTo>
+                  <a:pt x="2748741" y="1991915"/>
+                </a:lnTo>
+                <a:lnTo>
+                  <a:pt x="2793076" y="2040374"/>
+                </a:lnTo>
+                <a:lnTo>
+                  <a:pt x="2837410" y="2088556"/>
+                </a:lnTo>
+                <a:lnTo>
+                  <a:pt x="2881745" y="2136411"/>
+                </a:lnTo>
+                <a:lnTo>
+                  <a:pt x="2926080" y="2183887"/>
+                </a:lnTo>
+                <a:lnTo>
+                  <a:pt x="2970414" y="2230934"/>
+                </a:lnTo>
+                <a:lnTo>
+                  <a:pt x="3014749" y="2277498"/>
+                </a:lnTo>
+                <a:lnTo>
+                  <a:pt x="3059083" y="2323527"/>
+                </a:lnTo>
+                <a:lnTo>
+                  <a:pt x="3103418" y="2368966"/>
+                </a:lnTo>
+                <a:lnTo>
+                  <a:pt x="3147752" y="2413761"/>
+                </a:lnTo>
+                <a:lnTo>
+                  <a:pt x="3192087" y="2457856"/>
+                </a:lnTo>
+                <a:lnTo>
+                  <a:pt x="3236421" y="2501194"/>
+                </a:lnTo>
+                <a:lnTo>
+                  <a:pt x="3280756" y="2543718"/>
+                </a:lnTo>
+                <a:lnTo>
+                  <a:pt x="3325090" y="2585371"/>
+                </a:lnTo>
+                <a:lnTo>
+                  <a:pt x="3369425" y="2626093"/>
+                </a:lnTo>
+                <a:lnTo>
+                  <a:pt x="3413760" y="2665825"/>
+                </a:lnTo>
+                <a:lnTo>
+                  <a:pt x="3458094" y="2704506"/>
+                </a:lnTo>
+                <a:lnTo>
+                  <a:pt x="3502429" y="2742076"/>
+                </a:lnTo>
+                <a:lnTo>
+                  <a:pt x="3546763" y="2778472"/>
+                </a:lnTo>
+                <a:lnTo>
+                  <a:pt x="3591098" y="2813632"/>
+                </a:lnTo>
+                <a:lnTo>
+                  <a:pt x="3635432" y="2847492"/>
+                </a:lnTo>
+                <a:lnTo>
+                  <a:pt x="3679767" y="2879987"/>
+                </a:lnTo>
+                <a:lnTo>
+                  <a:pt x="3724101" y="2911054"/>
+                </a:lnTo>
+                <a:lnTo>
+                  <a:pt x="3768436" y="2940625"/>
+                </a:lnTo>
+                <a:lnTo>
+                  <a:pt x="3812770" y="2968634"/>
+                </a:lnTo>
+                <a:lnTo>
+                  <a:pt x="3857105" y="2995014"/>
+                </a:lnTo>
+                <a:lnTo>
+                  <a:pt x="3901440" y="3019696"/>
+                </a:lnTo>
+                <a:lnTo>
+                  <a:pt x="3945774" y="3042611"/>
+                </a:lnTo>
+                <a:lnTo>
+                  <a:pt x="3990109" y="3063690"/>
+                </a:lnTo>
+                <a:lnTo>
+                  <a:pt x="4034443" y="3082861"/>
+                </a:lnTo>
+                <a:lnTo>
+                  <a:pt x="4078778" y="3100054"/>
+                </a:lnTo>
+                <a:lnTo>
+                  <a:pt x="4123112" y="3115196"/>
+                </a:lnTo>
+                <a:lnTo>
+                  <a:pt x="4167447" y="3128214"/>
+                </a:lnTo>
+                <a:lnTo>
+                  <a:pt x="4211781" y="3139034"/>
+                </a:lnTo>
+                <a:lnTo>
+                  <a:pt x="4256116" y="3147583"/>
+                </a:lnTo>
+                <a:lnTo>
+                  <a:pt x="4300450" y="3153783"/>
+                </a:lnTo>
+                <a:lnTo>
+                  <a:pt x="4344785" y="3157560"/>
+                </a:lnTo>
+                <a:lnTo>
+                  <a:pt x="4389120" y="3158837"/>
+                </a:lnTo>
+              </a:path>
+            </a:pathLst>
+          </a:custGeom>
+          <a:noFill/>
+          <a:ln w="38100">
             <a:solidFill>
               <a:srgbClr val="8EDBD4"/>
             </a:solidFill>
           </a:ln>
           <a:effectLst/>
         </p:spPr>
-      </p:cxnSp>
-      <p:cxnSp>
-        <p:nvCxnSpPr>
-          <p:cNvPr id="20" name="C4-E37 line 18" descr="sci-ppt:o018"/>
-          <p:cNvCxnSpPr/>
-          <p:nvPr/>
-        </p:nvCxnSpPr>
-        <p:spPr>
-          <a:xfrm flipV="1">
-            <a:off x="2231136" y="2183855"/>
-            <a:ext cx="76581" cy="59789"/>
-          </a:xfrm>
-          <a:prstGeom prst="line">
-            <a:avLst/>
-          </a:prstGeom>
-          <a:ln w="25400">
-            <a:solidFill>
-              <a:srgbClr val="8EDBD4"/>
-            </a:solidFill>
-          </a:ln>
-          <a:effectLst/>
-        </p:spPr>
-      </p:cxnSp>
-      <p:cxnSp>
-        <p:nvCxnSpPr>
-          <p:cNvPr id="21" name="C4-E37 line 19" descr="sci-ppt:o019"/>
-          <p:cNvCxnSpPr/>
-          <p:nvPr/>
-        </p:nvCxnSpPr>
-        <p:spPr>
-          <a:xfrm flipV="1">
-            <a:off x="2307717" y="2124095"/>
-            <a:ext cx="76581" cy="59760"/>
-          </a:xfrm>
-          <a:prstGeom prst="line">
-            <a:avLst/>
-          </a:prstGeom>
-          <a:ln w="25400">
-            <a:solidFill>
-              <a:srgbClr val="8EDBD4"/>
-            </a:solidFill>
-          </a:ln>
-          <a:effectLst/>
-        </p:spPr>
-      </p:cxnSp>
-      <p:cxnSp>
-        <p:nvCxnSpPr>
-          <p:cNvPr id="22" name="C4-E37 line 20" descr="sci-ppt:o020"/>
-          <p:cNvCxnSpPr/>
-          <p:nvPr/>
-        </p:nvCxnSpPr>
-        <p:spPr>
-          <a:xfrm flipV="1">
-            <a:off x="2384298" y="2064694"/>
-            <a:ext cx="76581" cy="59401"/>
-          </a:xfrm>
-          <a:prstGeom prst="line">
-            <a:avLst/>
-          </a:prstGeom>
-          <a:ln w="25400">
-            <a:solidFill>
-              <a:srgbClr val="8EDBD4"/>
-            </a:solidFill>
-          </a:ln>
-          <a:effectLst/>
-        </p:spPr>
-      </p:cxnSp>
-      <p:cxnSp>
-        <p:nvCxnSpPr>
-          <p:cNvPr id="23" name="C4-E37 line 21" descr="sci-ppt:o021"/>
-          <p:cNvCxnSpPr/>
-          <p:nvPr/>
-        </p:nvCxnSpPr>
-        <p:spPr>
-          <a:xfrm flipV="1">
-            <a:off x="2460879" y="2005965"/>
-            <a:ext cx="76581" cy="58729"/>
-          </a:xfrm>
-          <a:prstGeom prst="line">
-            <a:avLst/>
-          </a:prstGeom>
-          <a:ln w="25400">
-            <a:solidFill>
-              <a:srgbClr val="8EDBD4"/>
-            </a:solidFill>
-          </a:ln>
-          <a:effectLst/>
-        </p:spPr>
-      </p:cxnSp>
+        <p:txBody>
+          <a:bodyPr rtlCol="0" anchor="ctr"/>
+          <a:lstStyle/>
+          <a:p>
+            <a:pPr algn="ctr"/>
+          </a:p>
+        </p:txBody>
+      </p:sp>
       <p:cxnSp>
         <p:nvCxnSpPr>
           <p:cNvPr id="24" name="C4-E37 line 22" descr="sci-ppt:o022"/>
@@ -3605,16 +4047,16 @@
           <p:nvPr/>
         </p:nvCxnSpPr>
         <p:spPr>
-          <a:xfrm flipV="1">
-            <a:off x="2537460" y="1948205"/>
-            <a:ext cx="76581" cy="57760"/>
+          <a:xfrm>
+            <a:off x="5943600" y="4846320"/>
+            <a:ext cx="2834640" cy="0"/>
           </a:xfrm>
           <a:prstGeom prst="line">
             <a:avLst/>
           </a:prstGeom>
-          <a:ln w="25400">
+          <a:ln w="19050">
             <a:solidFill>
-              <a:srgbClr val="8EDBD4"/>
+              <a:srgbClr val="B4C7D2"/>
             </a:solidFill>
           </a:ln>
           <a:effectLst/>
@@ -3627,16 +4069,16 @@
           <p:nvPr/>
         </p:nvCxnSpPr>
         <p:spPr>
-          <a:xfrm flipV="1">
-            <a:off x="2614041" y="1891701"/>
-            <a:ext cx="76581" cy="56504"/>
+          <a:xfrm>
+            <a:off x="5943600" y="1371600"/>
+            <a:ext cx="0" cy="3474720"/>
           </a:xfrm>
           <a:prstGeom prst="line">
             <a:avLst/>
           </a:prstGeom>
-          <a:ln w="25400">
+          <a:ln w="19050">
             <a:solidFill>
-              <a:srgbClr val="8EDBD4"/>
+              <a:srgbClr val="B4C7D2"/>
             </a:solidFill>
           </a:ln>
           <a:effectLst/>
@@ -3649,16 +4091,16 @@
           <p:nvPr/>
         </p:nvCxnSpPr>
         <p:spPr>
-          <a:xfrm flipV="1">
-            <a:off x="2690622" y="1836720"/>
-            <a:ext cx="76581" cy="54981"/>
+          <a:xfrm>
+            <a:off x="5943600" y="4846320"/>
+            <a:ext cx="0" cy="64008"/>
           </a:xfrm>
           <a:prstGeom prst="line">
             <a:avLst/>
           </a:prstGeom>
-          <a:ln w="25400">
+          <a:ln w="12700">
             <a:solidFill>
-              <a:srgbClr val="8EDBD4"/>
+              <a:srgbClr val="B4C7D2"/>
             </a:solidFill>
           </a:ln>
           <a:effectLst/>
@@ -3671,43 +4113,61 @@
           <p:nvPr/>
         </p:nvCxnSpPr>
         <p:spPr>
-          <a:xfrm flipV="1">
-            <a:off x="2767203" y="1783518"/>
-            <a:ext cx="76581" cy="53202"/>
+          <a:xfrm>
+            <a:off x="5943600" y="1371600"/>
+            <a:ext cx="0" cy="3474720"/>
           </a:xfrm>
           <a:prstGeom prst="line">
             <a:avLst/>
           </a:prstGeom>
-          <a:ln w="25400">
+          <a:ln w="7620">
             <a:solidFill>
-              <a:srgbClr val="8EDBD4"/>
+              <a:srgbClr val="2E4756"/>
             </a:solidFill>
           </a:ln>
           <a:effectLst/>
         </p:spPr>
       </p:cxnSp>
-      <p:cxnSp>
-        <p:nvCxnSpPr>
-          <p:cNvPr id="28" name="C4-E37 line 26" descr="sci-ppt:o026"/>
-          <p:cNvCxnSpPr/>
+      <p:sp>
+        <p:nvSpPr>
+          <p:cNvPr id="28" name="C4-E37 text 26" descr="sci-ppt:o026"/>
+          <p:cNvSpPr txBox="1"/>
           <p:nvPr/>
-        </p:nvCxnSpPr>
-        <p:spPr>
-          <a:xfrm flipV="1">
-            <a:off x="2843784" y="1732337"/>
-            <a:ext cx="76581" cy="51181"/>
-          </a:xfrm>
-          <a:prstGeom prst="line">
+        </p:nvSpPr>
+        <p:spPr>
+          <a:xfrm>
+            <a:off x="5486400" y="4928616"/>
+            <a:ext cx="914400" cy="208407"/>
+          </a:xfrm>
+          <a:prstGeom prst="rect">
             <a:avLst/>
           </a:prstGeom>
-          <a:ln w="25400">
-            <a:solidFill>
-              <a:srgbClr val="8EDBD4"/>
-            </a:solidFill>
-          </a:ln>
+          <a:noFill/>
           <a:effectLst/>
         </p:spPr>
-      </p:cxnSp>
+        <p:txBody>
+          <a:bodyPr wrap="none" lIns="18288" rIns="18288" tIns="18288" bIns="18288" anchor="t">
+            <a:spAutoFit/>
+          </a:bodyPr>
+          <a:lstStyle/>
+          <a:p>
+            <a:pPr algn="ctr">
+              <a:spcAft>
+                <a:spcPts val="0"/>
+              </a:spcAft>
+            </a:pPr>
+            <a:r>
+              <a:rPr sz="1050" b="0" i="0">
+                <a:solidFill>
+                  <a:srgbClr val="B4C7D2"/>
+                </a:solidFill>
+                <a:latin typeface="Arial"/>
+              </a:rPr>
+              <a:t>0</a:t>
+            </a:r>
+          </a:p>
+        </p:txBody>
+      </p:sp>
       <p:cxnSp>
         <p:nvCxnSpPr>
           <p:cNvPr id="29" name="C4-E37 line 27" descr="sci-ppt:o027"/>
@@ -3715,16 +4175,16 @@
           <p:nvPr/>
         </p:nvCxnSpPr>
         <p:spPr>
-          <a:xfrm flipV="1">
-            <a:off x="2920365" y="1683400"/>
-            <a:ext cx="76581" cy="48937"/>
+          <a:xfrm>
+            <a:off x="7360920" y="4846320"/>
+            <a:ext cx="0" cy="64008"/>
           </a:xfrm>
           <a:prstGeom prst="line">
             <a:avLst/>
           </a:prstGeom>
-          <a:ln w="25400">
+          <a:ln w="12700">
             <a:solidFill>
-              <a:srgbClr val="8EDBD4"/>
+              <a:srgbClr val="B4C7D2"/>
             </a:solidFill>
           </a:ln>
           <a:effectLst/>
@@ -3737,43 +4197,61 @@
           <p:nvPr/>
         </p:nvCxnSpPr>
         <p:spPr>
-          <a:xfrm flipV="1">
-            <a:off x="2996946" y="1636921"/>
-            <a:ext cx="76581" cy="46479"/>
+          <a:xfrm>
+            <a:off x="7360920" y="1371600"/>
+            <a:ext cx="0" cy="3474720"/>
           </a:xfrm>
           <a:prstGeom prst="line">
             <a:avLst/>
           </a:prstGeom>
-          <a:ln w="25400">
+          <a:ln w="7620">
             <a:solidFill>
-              <a:srgbClr val="8EDBD4"/>
+              <a:srgbClr val="2E4756"/>
             </a:solidFill>
           </a:ln>
           <a:effectLst/>
         </p:spPr>
       </p:cxnSp>
-      <p:cxnSp>
-        <p:nvCxnSpPr>
-          <p:cNvPr id="31" name="C4-E37 line 29" descr="sci-ppt:o029"/>
-          <p:cNvCxnSpPr/>
+      <p:sp>
+        <p:nvSpPr>
+          <p:cNvPr id="31" name="C4-E37 text 29" descr="sci-ppt:o029"/>
+          <p:cNvSpPr txBox="1"/>
           <p:nvPr/>
-        </p:nvCxnSpPr>
-        <p:spPr>
-          <a:xfrm flipV="1">
-            <a:off x="3073527" y="1593095"/>
-            <a:ext cx="76581" cy="43826"/>
-          </a:xfrm>
-          <a:prstGeom prst="line">
+        </p:nvSpPr>
+        <p:spPr>
+          <a:xfrm>
+            <a:off x="6903720" y="4928616"/>
+            <a:ext cx="914400" cy="208407"/>
+          </a:xfrm>
+          <a:prstGeom prst="rect">
             <a:avLst/>
           </a:prstGeom>
-          <a:ln w="25400">
-            <a:solidFill>
-              <a:srgbClr val="8EDBD4"/>
-            </a:solidFill>
-          </a:ln>
+          <a:noFill/>
           <a:effectLst/>
         </p:spPr>
-      </p:cxnSp>
+        <p:txBody>
+          <a:bodyPr wrap="none" lIns="18288" rIns="18288" tIns="18288" bIns="18288" anchor="t">
+            <a:spAutoFit/>
+          </a:bodyPr>
+          <a:lstStyle/>
+          <a:p>
+            <a:pPr algn="ctr">
+              <a:spcAft>
+                <a:spcPts val="0"/>
+              </a:spcAft>
+            </a:pPr>
+            <a:r>
+              <a:rPr sz="1050" b="0" i="0">
+                <a:solidFill>
+                  <a:srgbClr val="B4C7D2"/>
+                </a:solidFill>
+                <a:latin typeface="Arial"/>
+              </a:rPr>
+              <a:t>1</a:t>
+            </a:r>
+          </a:p>
+        </p:txBody>
+      </p:sp>
       <p:cxnSp>
         <p:nvCxnSpPr>
           <p:cNvPr id="32" name="C4-E37 line 30" descr="sci-ppt:o030"/>
@@ -3781,16 +4259,16 @@
           <p:nvPr/>
         </p:nvCxnSpPr>
         <p:spPr>
-          <a:xfrm flipV="1">
-            <a:off x="3150108" y="1552104"/>
-            <a:ext cx="76581" cy="40991"/>
+          <a:xfrm>
+            <a:off x="8778240" y="4846320"/>
+            <a:ext cx="0" cy="64008"/>
           </a:xfrm>
           <a:prstGeom prst="line">
             <a:avLst/>
           </a:prstGeom>
-          <a:ln w="25400">
+          <a:ln w="12700">
             <a:solidFill>
-              <a:srgbClr val="8EDBD4"/>
+              <a:srgbClr val="B4C7D2"/>
             </a:solidFill>
           </a:ln>
           <a:effectLst/>
@@ -3803,43 +4281,61 @@
           <p:nvPr/>
         </p:nvCxnSpPr>
         <p:spPr>
-          <a:xfrm flipV="1">
-            <a:off x="3226689" y="1514117"/>
-            <a:ext cx="76581" cy="37987"/>
+          <a:xfrm>
+            <a:off x="8778240" y="1371600"/>
+            <a:ext cx="0" cy="3474720"/>
           </a:xfrm>
           <a:prstGeom prst="line">
             <a:avLst/>
           </a:prstGeom>
-          <a:ln w="25400">
+          <a:ln w="7620">
             <a:solidFill>
-              <a:srgbClr val="8EDBD4"/>
+              <a:srgbClr val="2E4756"/>
             </a:solidFill>
           </a:ln>
           <a:effectLst/>
         </p:spPr>
       </p:cxnSp>
-      <p:cxnSp>
-        <p:nvCxnSpPr>
-          <p:cNvPr id="34" name="C4-E37 line 32" descr="sci-ppt:o032"/>
-          <p:cNvCxnSpPr/>
+      <p:sp>
+        <p:nvSpPr>
+          <p:cNvPr id="34" name="C4-E37 text 32" descr="sci-ppt:o032"/>
+          <p:cNvSpPr txBox="1"/>
           <p:nvPr/>
-        </p:nvCxnSpPr>
-        <p:spPr>
-          <a:xfrm flipV="1">
-            <a:off x="3303270" y="1479287"/>
-            <a:ext cx="76581" cy="34830"/>
-          </a:xfrm>
-          <a:prstGeom prst="line">
+        </p:nvSpPr>
+        <p:spPr>
+          <a:xfrm>
+            <a:off x="8321040" y="4928616"/>
+            <a:ext cx="914400" cy="208407"/>
+          </a:xfrm>
+          <a:prstGeom prst="rect">
             <a:avLst/>
           </a:prstGeom>
-          <a:ln w="25400">
-            <a:solidFill>
-              <a:srgbClr val="8EDBD4"/>
-            </a:solidFill>
-          </a:ln>
+          <a:noFill/>
           <a:effectLst/>
         </p:spPr>
-      </p:cxnSp>
+        <p:txBody>
+          <a:bodyPr wrap="none" lIns="18288" rIns="18288" tIns="18288" bIns="18288" anchor="t">
+            <a:spAutoFit/>
+          </a:bodyPr>
+          <a:lstStyle/>
+          <a:p>
+            <a:pPr algn="ctr">
+              <a:spcAft>
+                <a:spcPts val="0"/>
+              </a:spcAft>
+            </a:pPr>
+            <a:r>
+              <a:rPr sz="1050" b="0" i="0">
+                <a:solidFill>
+                  <a:srgbClr val="B4C7D2"/>
+                </a:solidFill>
+                <a:latin typeface="Arial"/>
+              </a:rPr>
+              <a:t>2</a:t>
+            </a:r>
+          </a:p>
+        </p:txBody>
+      </p:sp>
       <p:cxnSp>
         <p:nvCxnSpPr>
           <p:cNvPr id="35" name="C4-E37 line 33" descr="sci-ppt:o033"/>
@@ -3847,16 +4343,16 @@
           <p:nvPr/>
         </p:nvCxnSpPr>
         <p:spPr>
-          <a:xfrm flipV="1">
-            <a:off x="3379851" y="1447751"/>
-            <a:ext cx="76581" cy="31536"/>
+          <a:xfrm>
+            <a:off x="5879592" y="4846320"/>
+            <a:ext cx="64008" cy="0"/>
           </a:xfrm>
           <a:prstGeom prst="line">
             <a:avLst/>
           </a:prstGeom>
-          <a:ln w="25400">
+          <a:ln w="12700">
             <a:solidFill>
-              <a:srgbClr val="8EDBD4"/>
+              <a:srgbClr val="B4C7D2"/>
             </a:solidFill>
           </a:ln>
           <a:effectLst/>
@@ -3869,16 +4365,16 @@
           <p:nvPr/>
         </p:nvCxnSpPr>
         <p:spPr>
-          <a:xfrm flipV="1">
-            <a:off x="3456432" y="1419633"/>
-            <a:ext cx="76581" cy="28118"/>
+          <a:xfrm>
+            <a:off x="5879592" y="3108960"/>
+            <a:ext cx="64008" cy="0"/>
           </a:xfrm>
           <a:prstGeom prst="line">
             <a:avLst/>
           </a:prstGeom>
-          <a:ln w="25400">
+          <a:ln w="12700">
             <a:solidFill>
-              <a:srgbClr val="8EDBD4"/>
+              <a:srgbClr val="B4C7D2"/>
             </a:solidFill>
           </a:ln>
           <a:effectLst/>
@@ -3891,43 +4387,61 @@
           <p:nvPr/>
         </p:nvCxnSpPr>
         <p:spPr>
-          <a:xfrm flipV="1">
-            <a:off x="3533013" y="1395044"/>
-            <a:ext cx="76581" cy="24589"/>
+          <a:xfrm>
+            <a:off x="5943600" y="3108960"/>
+            <a:ext cx="2834640" cy="0"/>
           </a:xfrm>
           <a:prstGeom prst="line">
             <a:avLst/>
           </a:prstGeom>
-          <a:ln w="25400">
+          <a:ln w="7620">
             <a:solidFill>
-              <a:srgbClr val="8EDBD4"/>
+              <a:srgbClr val="2E4756"/>
             </a:solidFill>
           </a:ln>
           <a:effectLst/>
         </p:spPr>
       </p:cxnSp>
-      <p:cxnSp>
-        <p:nvCxnSpPr>
-          <p:cNvPr id="38" name="C4-E37 line 36" descr="sci-ppt:o036"/>
-          <p:cNvCxnSpPr/>
+      <p:sp>
+        <p:nvSpPr>
+          <p:cNvPr id="38" name="C4-E37 text 36" descr="sci-ppt:o036"/>
+          <p:cNvSpPr txBox="1"/>
           <p:nvPr/>
-        </p:nvCxnSpPr>
-        <p:spPr>
-          <a:xfrm flipV="1">
-            <a:off x="3609594" y="1374077"/>
-            <a:ext cx="76581" cy="20967"/>
-          </a:xfrm>
-          <a:prstGeom prst="line">
+        </p:nvSpPr>
+        <p:spPr>
+          <a:xfrm>
+            <a:off x="5074920" y="3026664"/>
+            <a:ext cx="777240" cy="208407"/>
+          </a:xfrm>
+          <a:prstGeom prst="rect">
             <a:avLst/>
           </a:prstGeom>
-          <a:ln w="25400">
-            <a:solidFill>
-              <a:srgbClr val="8EDBD4"/>
-            </a:solidFill>
-          </a:ln>
+          <a:noFill/>
           <a:effectLst/>
         </p:spPr>
-      </p:cxnSp>
+        <p:txBody>
+          <a:bodyPr wrap="none" lIns="18288" rIns="18288" tIns="18288" bIns="18288" anchor="t">
+            <a:spAutoFit/>
+          </a:bodyPr>
+          <a:lstStyle/>
+          <a:p>
+            <a:pPr algn="r">
+              <a:spcAft>
+                <a:spcPts val="0"/>
+              </a:spcAft>
+            </a:pPr>
+            <a:r>
+              <a:rPr sz="1050" b="0" i="0">
+                <a:solidFill>
+                  <a:srgbClr val="B4C7D2"/>
+                </a:solidFill>
+                <a:latin typeface="Arial"/>
+              </a:rPr>
+              <a:t>2</a:t>
+            </a:r>
+          </a:p>
+        </p:txBody>
+      </p:sp>
       <p:cxnSp>
         <p:nvCxnSpPr>
           <p:cNvPr id="39" name="C4-E37 line 37" descr="sci-ppt:o037"/>
@@ -3935,16 +4449,16 @@
           <p:nvPr/>
         </p:nvCxnSpPr>
         <p:spPr>
-          <a:xfrm flipV="1">
-            <a:off x="3686175" y="1356814"/>
-            <a:ext cx="76581" cy="17263"/>
+          <a:xfrm>
+            <a:off x="5879592" y="1371600"/>
+            <a:ext cx="64008" cy="0"/>
           </a:xfrm>
           <a:prstGeom prst="line">
             <a:avLst/>
           </a:prstGeom>
-          <a:ln w="25400">
+          <a:ln w="12700">
             <a:solidFill>
-              <a:srgbClr val="8EDBD4"/>
+              <a:srgbClr val="B4C7D2"/>
             </a:solidFill>
           </a:ln>
           <a:effectLst/>
@@ -3957,991 +4471,415 @@
           <p:nvPr/>
         </p:nvCxnSpPr>
         <p:spPr>
-          <a:xfrm flipV="1">
-            <a:off x="3762756" y="1343318"/>
-            <a:ext cx="76581" cy="13496"/>
+          <a:xfrm>
+            <a:off x="5943600" y="1371600"/>
+            <a:ext cx="2834640" cy="0"/>
           </a:xfrm>
           <a:prstGeom prst="line">
             <a:avLst/>
           </a:prstGeom>
-          <a:ln w="25400">
+          <a:ln w="7620">
+            <a:solidFill>
+              <a:srgbClr val="2E4756"/>
+            </a:solidFill>
+          </a:ln>
+          <a:effectLst/>
+        </p:spPr>
+      </p:cxnSp>
+      <p:sp>
+        <p:nvSpPr>
+          <p:cNvPr id="41" name="C4-E37 text 39" descr="sci-ppt:o039"/>
+          <p:cNvSpPr txBox="1"/>
+          <p:nvPr/>
+        </p:nvSpPr>
+        <p:spPr>
+          <a:xfrm>
+            <a:off x="5074920" y="1289304"/>
+            <a:ext cx="777240" cy="208407"/>
+          </a:xfrm>
+          <a:prstGeom prst="rect">
+            <a:avLst/>
+          </a:prstGeom>
+          <a:noFill/>
+          <a:effectLst/>
+        </p:spPr>
+        <p:txBody>
+          <a:bodyPr wrap="none" lIns="18288" rIns="18288" tIns="18288" bIns="18288" anchor="t">
+            <a:spAutoFit/>
+          </a:bodyPr>
+          <a:lstStyle/>
+          <a:p>
+            <a:pPr algn="r">
+              <a:spcAft>
+                <a:spcPts val="0"/>
+              </a:spcAft>
+            </a:pPr>
+            <a:r>
+              <a:rPr sz="1050" b="0" i="0">
+                <a:solidFill>
+                  <a:srgbClr val="B4C7D2"/>
+                </a:solidFill>
+                <a:latin typeface="Arial"/>
+              </a:rPr>
+              <a:t>4</a:t>
+            </a:r>
+          </a:p>
+        </p:txBody>
+      </p:sp>
+      <p:sp>
+        <p:nvSpPr>
+          <p:cNvPr id="42" name="C4-E37 text 40" descr="sci-ppt:o040"/>
+          <p:cNvSpPr txBox="1"/>
+          <p:nvPr/>
+        </p:nvSpPr>
+        <p:spPr>
+          <a:xfrm>
+            <a:off x="5943600" y="5129783"/>
+            <a:ext cx="2834640" cy="231648"/>
+          </a:xfrm>
+          <a:prstGeom prst="rect">
+            <a:avLst/>
+          </a:prstGeom>
+          <a:noFill/>
+          <a:effectLst/>
+        </p:spPr>
+        <p:txBody>
+          <a:bodyPr wrap="none" lIns="18288" rIns="18288" tIns="18288" bIns="18288" anchor="t">
+            <a:spAutoFit/>
+          </a:bodyPr>
+          <a:lstStyle/>
+          <a:p>
+            <a:pPr algn="ctr">
+              <a:spcAft>
+                <a:spcPts val="0"/>
+              </a:spcAft>
+            </a:pPr>
+            <a:r>
+              <a:rPr sz="1200" b="0" i="0">
+                <a:solidFill>
+                  <a:srgbClr val="E7F0F3"/>
+                </a:solidFill>
+                <a:latin typeface="Arial"/>
+              </a:rPr>
+              <a:t>p₀ / p₀,crit</a:t>
+            </a:r>
+          </a:p>
+        </p:txBody>
+      </p:sp>
+      <p:sp>
+        <p:nvSpPr>
+          <p:cNvPr id="43" name="C4-E37 text 41" descr="sci-ppt:o041"/>
+          <p:cNvSpPr txBox="1"/>
+          <p:nvPr/>
+        </p:nvSpPr>
+        <p:spPr>
+          <a:xfrm>
+            <a:off x="5394960" y="1024128"/>
+            <a:ext cx="2834640" cy="231648"/>
+          </a:xfrm>
+          <a:prstGeom prst="rect">
+            <a:avLst/>
+          </a:prstGeom>
+          <a:noFill/>
+          <a:effectLst/>
+        </p:spPr>
+        <p:txBody>
+          <a:bodyPr wrap="none" lIns="18288" rIns="18288" tIns="18288" bIns="18288" anchor="t">
+            <a:spAutoFit/>
+          </a:bodyPr>
+          <a:lstStyle/>
+          <a:p>
+            <a:pPr algn="l">
+              <a:spcAft>
+                <a:spcPts val="0"/>
+              </a:spcAft>
+            </a:pPr>
+            <a:r>
+              <a:rPr sz="1200" b="0" i="0">
+                <a:solidFill>
+                  <a:srgbClr val="E7F0F3"/>
+                </a:solidFill>
+                <a:latin typeface="Arial"/>
+              </a:rPr>
+              <a:t>G / Γ</a:t>
+            </a:r>
+          </a:p>
+        </p:txBody>
+      </p:sp>
+      <p:sp>
+        <p:nvSpPr>
+          <p:cNvPr id="44" name="C4-E37 polygon 42" descr="sci-ppt:o042"/>
+          <p:cNvSpPr/>
+          <p:nvPr/>
+        </p:nvSpPr>
+        <p:spPr>
+          <a:xfrm>
+            <a:off x="5943600" y="1371600"/>
+            <a:ext cx="2834640" cy="3474720"/>
+          </a:xfrm>
+          <a:custGeom>
+            <a:avLst/>
+            <a:gdLst/>
+            <a:ahLst/>
+            <a:cxnLst/>
+            <a:rect l="l" t="t" r="r" b="b"/>
+            <a:pathLst>
+              <a:path w="2834640" h="3474720">
+                <a:moveTo>
+                  <a:pt x="0" y="3474720"/>
+                </a:moveTo>
+                <a:lnTo>
+                  <a:pt x="48044" y="3473721"/>
+                </a:lnTo>
+                <a:lnTo>
+                  <a:pt x="96089" y="3470727"/>
+                </a:lnTo>
+                <a:lnTo>
+                  <a:pt x="144134" y="3465736"/>
+                </a:lnTo>
+                <a:lnTo>
+                  <a:pt x="192178" y="3458748"/>
+                </a:lnTo>
+                <a:lnTo>
+                  <a:pt x="240223" y="3449765"/>
+                </a:lnTo>
+                <a:lnTo>
+                  <a:pt x="288268" y="3438784"/>
+                </a:lnTo>
+                <a:lnTo>
+                  <a:pt x="336313" y="3425808"/>
+                </a:lnTo>
+                <a:lnTo>
+                  <a:pt x="384357" y="3410835"/>
+                </a:lnTo>
+                <a:lnTo>
+                  <a:pt x="432402" y="3393866"/>
+                </a:lnTo>
+                <a:lnTo>
+                  <a:pt x="480447" y="3374900"/>
+                </a:lnTo>
+                <a:lnTo>
+                  <a:pt x="528492" y="3353938"/>
+                </a:lnTo>
+                <a:lnTo>
+                  <a:pt x="576536" y="3330979"/>
+                </a:lnTo>
+                <a:lnTo>
+                  <a:pt x="624581" y="3306024"/>
+                </a:lnTo>
+                <a:lnTo>
+                  <a:pt x="672626" y="3279073"/>
+                </a:lnTo>
+                <a:lnTo>
+                  <a:pt x="720671" y="3250125"/>
+                </a:lnTo>
+                <a:lnTo>
+                  <a:pt x="768715" y="3219181"/>
+                </a:lnTo>
+                <a:lnTo>
+                  <a:pt x="816760" y="3186241"/>
+                </a:lnTo>
+                <a:lnTo>
+                  <a:pt x="864805" y="3151304"/>
+                </a:lnTo>
+                <a:lnTo>
+                  <a:pt x="912850" y="3114371"/>
+                </a:lnTo>
+                <a:lnTo>
+                  <a:pt x="960894" y="3075441"/>
+                </a:lnTo>
+                <a:lnTo>
+                  <a:pt x="1008939" y="3034515"/>
+                </a:lnTo>
+                <a:lnTo>
+                  <a:pt x="1056984" y="2991593"/>
+                </a:lnTo>
+                <a:lnTo>
+                  <a:pt x="1105029" y="2946674"/>
+                </a:lnTo>
+                <a:lnTo>
+                  <a:pt x="1153073" y="2899759"/>
+                </a:lnTo>
+                <a:lnTo>
+                  <a:pt x="1201118" y="2850847"/>
+                </a:lnTo>
+                <a:lnTo>
+                  <a:pt x="1249163" y="2799939"/>
+                </a:lnTo>
+                <a:lnTo>
+                  <a:pt x="1297208" y="2747035"/>
+                </a:lnTo>
+                <a:lnTo>
+                  <a:pt x="1345252" y="2692134"/>
+                </a:lnTo>
+                <a:lnTo>
+                  <a:pt x="1393297" y="2635237"/>
+                </a:lnTo>
+                <a:lnTo>
+                  <a:pt x="1441342" y="2576343"/>
+                </a:lnTo>
+                <a:lnTo>
+                  <a:pt x="1489387" y="2515453"/>
+                </a:lnTo>
+                <a:lnTo>
+                  <a:pt x="1537431" y="2452567"/>
+                </a:lnTo>
+                <a:lnTo>
+                  <a:pt x="1585476" y="2387684"/>
+                </a:lnTo>
+                <a:lnTo>
+                  <a:pt x="1633521" y="2320805"/>
+                </a:lnTo>
+                <a:lnTo>
+                  <a:pt x="1681566" y="2251929"/>
+                </a:lnTo>
+                <a:lnTo>
+                  <a:pt x="1729610" y="2181058"/>
+                </a:lnTo>
+                <a:lnTo>
+                  <a:pt x="1777655" y="2108189"/>
+                </a:lnTo>
+                <a:lnTo>
+                  <a:pt x="1825700" y="2033325"/>
+                </a:lnTo>
+                <a:lnTo>
+                  <a:pt x="1873745" y="1956464"/>
+                </a:lnTo>
+                <a:lnTo>
+                  <a:pt x="1921789" y="1877606"/>
+                </a:lnTo>
+                <a:lnTo>
+                  <a:pt x="1969834" y="1796752"/>
+                </a:lnTo>
+                <a:lnTo>
+                  <a:pt x="2017879" y="1713902"/>
+                </a:lnTo>
+                <a:lnTo>
+                  <a:pt x="2065924" y="1629055"/>
+                </a:lnTo>
+                <a:lnTo>
+                  <a:pt x="2113968" y="1542212"/>
+                </a:lnTo>
+                <a:lnTo>
+                  <a:pt x="2162013" y="1453373"/>
+                </a:lnTo>
+                <a:lnTo>
+                  <a:pt x="2210058" y="1362537"/>
+                </a:lnTo>
+                <a:lnTo>
+                  <a:pt x="2258103" y="1269705"/>
+                </a:lnTo>
+                <a:lnTo>
+                  <a:pt x="2306147" y="1174876"/>
+                </a:lnTo>
+                <a:lnTo>
+                  <a:pt x="2354192" y="1078051"/>
+                </a:lnTo>
+                <a:lnTo>
+                  <a:pt x="2402237" y="979230"/>
+                </a:lnTo>
+                <a:lnTo>
+                  <a:pt x="2450282" y="878412"/>
+                </a:lnTo>
+                <a:lnTo>
+                  <a:pt x="2498326" y="775598"/>
+                </a:lnTo>
+                <a:lnTo>
+                  <a:pt x="2546371" y="670787"/>
+                </a:lnTo>
+                <a:lnTo>
+                  <a:pt x="2594416" y="563980"/>
+                </a:lnTo>
+                <a:lnTo>
+                  <a:pt x="2642461" y="455177"/>
+                </a:lnTo>
+                <a:lnTo>
+                  <a:pt x="2690505" y="344377"/>
+                </a:lnTo>
+                <a:lnTo>
+                  <a:pt x="2738550" y="231581"/>
+                </a:lnTo>
+                <a:lnTo>
+                  <a:pt x="2786595" y="116788"/>
+                </a:lnTo>
+                <a:lnTo>
+                  <a:pt x="2834640" y="0"/>
+                </a:lnTo>
+              </a:path>
+            </a:pathLst>
+          </a:custGeom>
+          <a:noFill/>
+          <a:ln w="38100">
+            <a:solidFill>
+              <a:srgbClr val="F2B880"/>
+            </a:solidFill>
+          </a:ln>
+          <a:effectLst/>
+        </p:spPr>
+        <p:txBody>
+          <a:bodyPr rtlCol="0" anchor="ctr"/>
+          <a:lstStyle/>
+          <a:p>
+            <a:pPr algn="ctr"/>
+          </a:p>
+        </p:txBody>
+      </p:sp>
+      <p:sp>
+        <p:nvSpPr>
+          <p:cNvPr id="45" name="C4-E37 ellipse 43" descr="sci-ppt:o043"/>
+          <p:cNvSpPr/>
+          <p:nvPr/>
+        </p:nvSpPr>
+        <p:spPr>
+          <a:xfrm>
+            <a:off x="7287768" y="3904487"/>
+            <a:ext cx="146304" cy="146304"/>
+          </a:xfrm>
+          <a:prstGeom prst="ellipse">
+            <a:avLst/>
+          </a:prstGeom>
+          <a:solidFill>
+            <a:srgbClr val="F2B880"/>
+          </a:solidFill>
+          <a:ln w="12700">
+            <a:solidFill>
+              <a:srgbClr val="F2B880"/>
+            </a:solidFill>
+          </a:ln>
+          <a:effectLst/>
+        </p:spPr>
+        <p:txBody>
+          <a:bodyPr rtlCol="0" anchor="ctr"/>
+          <a:lstStyle/>
+          <a:p>
+            <a:pPr algn="ctr"/>
+          </a:p>
+        </p:txBody>
+      </p:sp>
+      <p:sp>
+        <p:nvSpPr>
+          <p:cNvPr id="46" name="C4-E37 round_rect 44" descr="sci-ppt:o044"/>
+          <p:cNvSpPr/>
+          <p:nvPr/>
+        </p:nvSpPr>
+        <p:spPr>
+          <a:xfrm>
+            <a:off x="9052560" y="1371600"/>
+            <a:ext cx="2788920" cy="3474720"/>
+          </a:xfrm>
+          <a:prstGeom prst="roundRect">
+            <a:avLst/>
+          </a:prstGeom>
+          <a:solidFill>
+            <a:srgbClr val="213E4B"/>
+          </a:solidFill>
+          <a:ln w="20320">
             <a:solidFill>
               <a:srgbClr val="8EDBD4"/>
             </a:solidFill>
           </a:ln>
           <a:effectLst/>
         </p:spPr>
-      </p:cxnSp>
-      <p:cxnSp>
-        <p:nvCxnSpPr>
-          <p:cNvPr id="41" name="C4-E37 line 39" descr="sci-ppt:o039"/>
-          <p:cNvCxnSpPr/>
-          <p:nvPr/>
-        </p:nvCxnSpPr>
-        <p:spPr>
-          <a:xfrm flipV="1">
-            <a:off x="3839337" y="1333642"/>
-            <a:ext cx="76581" cy="9676"/>
-          </a:xfrm>
-          <a:prstGeom prst="line">
-            <a:avLst/>
-          </a:prstGeom>
-          <a:ln w="25400">
-            <a:solidFill>
-              <a:srgbClr val="8EDBD4"/>
-            </a:solidFill>
-          </a:ln>
-          <a:effectLst/>
-        </p:spPr>
-      </p:cxnSp>
-      <p:cxnSp>
-        <p:nvCxnSpPr>
-          <p:cNvPr id="42" name="C4-E37 line 40" descr="sci-ppt:o040"/>
-          <p:cNvCxnSpPr/>
-          <p:nvPr/>
-        </p:nvCxnSpPr>
-        <p:spPr>
-          <a:xfrm flipV="1">
-            <a:off x="3915918" y="1327822"/>
-            <a:ext cx="76581" cy="5820"/>
-          </a:xfrm>
-          <a:prstGeom prst="line">
-            <a:avLst/>
-          </a:prstGeom>
-          <a:ln w="25400">
-            <a:solidFill>
-              <a:srgbClr val="8EDBD4"/>
-            </a:solidFill>
-          </a:ln>
-          <a:effectLst/>
-        </p:spPr>
-      </p:cxnSp>
-      <p:cxnSp>
-        <p:nvCxnSpPr>
-          <p:cNvPr id="43" name="C4-E37 line 41" descr="sci-ppt:o041"/>
-          <p:cNvCxnSpPr/>
-          <p:nvPr/>
-        </p:nvCxnSpPr>
-        <p:spPr>
-          <a:xfrm flipV="1">
-            <a:off x="3992499" y="1325880"/>
-            <a:ext cx="76581" cy="1942"/>
-          </a:xfrm>
-          <a:prstGeom prst="line">
-            <a:avLst/>
-          </a:prstGeom>
-          <a:ln w="25400">
-            <a:solidFill>
-              <a:srgbClr val="8EDBD4"/>
-            </a:solidFill>
-          </a:ln>
-          <a:effectLst/>
-        </p:spPr>
-      </p:cxnSp>
-      <p:cxnSp>
-        <p:nvCxnSpPr>
-          <p:cNvPr id="44" name="C4-E37 line 42" descr="sci-ppt:o042"/>
-          <p:cNvCxnSpPr/>
-          <p:nvPr/>
-        </p:nvCxnSpPr>
-        <p:spPr>
-          <a:xfrm>
-            <a:off x="4069080" y="1325880"/>
-            <a:ext cx="76580" cy="1942"/>
-          </a:xfrm>
-          <a:prstGeom prst="line">
-            <a:avLst/>
-          </a:prstGeom>
-          <a:ln w="25400">
-            <a:solidFill>
-              <a:srgbClr val="8EDBD4"/>
-            </a:solidFill>
-          </a:ln>
-          <a:effectLst/>
-        </p:spPr>
-      </p:cxnSp>
-      <p:cxnSp>
-        <p:nvCxnSpPr>
-          <p:cNvPr id="45" name="C4-E37 line 43" descr="sci-ppt:o043"/>
-          <p:cNvCxnSpPr/>
-          <p:nvPr/>
-        </p:nvCxnSpPr>
-        <p:spPr>
-          <a:xfrm>
-            <a:off x="4145660" y="1327822"/>
-            <a:ext cx="76582" cy="5820"/>
-          </a:xfrm>
-          <a:prstGeom prst="line">
-            <a:avLst/>
-          </a:prstGeom>
-          <a:ln w="25400">
-            <a:solidFill>
-              <a:srgbClr val="8EDBD4"/>
-            </a:solidFill>
-          </a:ln>
-          <a:effectLst/>
-        </p:spPr>
-      </p:cxnSp>
-      <p:cxnSp>
-        <p:nvCxnSpPr>
-          <p:cNvPr id="46" name="C4-E37 line 44" descr="sci-ppt:o044"/>
-          <p:cNvCxnSpPr/>
-          <p:nvPr/>
-        </p:nvCxnSpPr>
-        <p:spPr>
-          <a:xfrm>
-            <a:off x="4222242" y="1333642"/>
-            <a:ext cx="76581" cy="9676"/>
-          </a:xfrm>
-          <a:prstGeom prst="line">
-            <a:avLst/>
-          </a:prstGeom>
-          <a:ln w="25400">
-            <a:solidFill>
-              <a:srgbClr val="8EDBD4"/>
-            </a:solidFill>
-          </a:ln>
-          <a:effectLst/>
-        </p:spPr>
-      </p:cxnSp>
-      <p:cxnSp>
-        <p:nvCxnSpPr>
-          <p:cNvPr id="47" name="C4-E37 line 45" descr="sci-ppt:o045"/>
-          <p:cNvCxnSpPr/>
-          <p:nvPr/>
-        </p:nvCxnSpPr>
-        <p:spPr>
-          <a:xfrm>
-            <a:off x="4298823" y="1343318"/>
-            <a:ext cx="76581" cy="13496"/>
-          </a:xfrm>
-          <a:prstGeom prst="line">
-            <a:avLst/>
-          </a:prstGeom>
-          <a:ln w="25400">
-            <a:solidFill>
-              <a:srgbClr val="8EDBD4"/>
-            </a:solidFill>
-          </a:ln>
-          <a:effectLst/>
-        </p:spPr>
-      </p:cxnSp>
-      <p:cxnSp>
-        <p:nvCxnSpPr>
-          <p:cNvPr id="48" name="C4-E37 line 46" descr="sci-ppt:o046"/>
-          <p:cNvCxnSpPr/>
-          <p:nvPr/>
-        </p:nvCxnSpPr>
-        <p:spPr>
-          <a:xfrm>
-            <a:off x="4375404" y="1356814"/>
-            <a:ext cx="76581" cy="17263"/>
-          </a:xfrm>
-          <a:prstGeom prst="line">
-            <a:avLst/>
-          </a:prstGeom>
-          <a:ln w="25400">
-            <a:solidFill>
-              <a:srgbClr val="8EDBD4"/>
-            </a:solidFill>
-          </a:ln>
-          <a:effectLst/>
-        </p:spPr>
-      </p:cxnSp>
-      <p:cxnSp>
-        <p:nvCxnSpPr>
-          <p:cNvPr id="49" name="C4-E37 line 47" descr="sci-ppt:o047"/>
-          <p:cNvCxnSpPr/>
-          <p:nvPr/>
-        </p:nvCxnSpPr>
-        <p:spPr>
-          <a:xfrm>
-            <a:off x="4451985" y="1374077"/>
-            <a:ext cx="76581" cy="20967"/>
-          </a:xfrm>
-          <a:prstGeom prst="line">
-            <a:avLst/>
-          </a:prstGeom>
-          <a:ln w="25400">
-            <a:solidFill>
-              <a:srgbClr val="8EDBD4"/>
-            </a:solidFill>
-          </a:ln>
-          <a:effectLst/>
-        </p:spPr>
-      </p:cxnSp>
-      <p:cxnSp>
-        <p:nvCxnSpPr>
-          <p:cNvPr id="50" name="C4-E37 line 48" descr="sci-ppt:o048"/>
-          <p:cNvCxnSpPr/>
-          <p:nvPr/>
-        </p:nvCxnSpPr>
-        <p:spPr>
-          <a:xfrm>
-            <a:off x="4528566" y="1395044"/>
-            <a:ext cx="76581" cy="24589"/>
-          </a:xfrm>
-          <a:prstGeom prst="line">
-            <a:avLst/>
-          </a:prstGeom>
-          <a:ln w="25400">
-            <a:solidFill>
-              <a:srgbClr val="8EDBD4"/>
-            </a:solidFill>
-          </a:ln>
-          <a:effectLst/>
-        </p:spPr>
-      </p:cxnSp>
-      <p:cxnSp>
-        <p:nvCxnSpPr>
-          <p:cNvPr id="51" name="C4-E37 line 49" descr="sci-ppt:o049"/>
-          <p:cNvCxnSpPr/>
-          <p:nvPr/>
-        </p:nvCxnSpPr>
-        <p:spPr>
-          <a:xfrm>
-            <a:off x="4605147" y="1419633"/>
-            <a:ext cx="76581" cy="28118"/>
-          </a:xfrm>
-          <a:prstGeom prst="line">
-            <a:avLst/>
-          </a:prstGeom>
-          <a:ln w="25400">
-            <a:solidFill>
-              <a:srgbClr val="8EDBD4"/>
-            </a:solidFill>
-          </a:ln>
-          <a:effectLst/>
-        </p:spPr>
-      </p:cxnSp>
-      <p:cxnSp>
-        <p:nvCxnSpPr>
-          <p:cNvPr id="52" name="C4-E37 line 50" descr="sci-ppt:o050"/>
-          <p:cNvCxnSpPr/>
-          <p:nvPr/>
-        </p:nvCxnSpPr>
-        <p:spPr>
-          <a:xfrm>
-            <a:off x="4681728" y="1447751"/>
-            <a:ext cx="76580" cy="31536"/>
-          </a:xfrm>
-          <a:prstGeom prst="line">
-            <a:avLst/>
-          </a:prstGeom>
-          <a:ln w="25400">
-            <a:solidFill>
-              <a:srgbClr val="8EDBD4"/>
-            </a:solidFill>
-          </a:ln>
-          <a:effectLst/>
-        </p:spPr>
-      </p:cxnSp>
-      <p:cxnSp>
-        <p:nvCxnSpPr>
-          <p:cNvPr id="53" name="C4-E37 line 51" descr="sci-ppt:o051"/>
-          <p:cNvCxnSpPr/>
-          <p:nvPr/>
-        </p:nvCxnSpPr>
-        <p:spPr>
-          <a:xfrm>
-            <a:off x="4758308" y="1479287"/>
-            <a:ext cx="76582" cy="34830"/>
-          </a:xfrm>
-          <a:prstGeom prst="line">
-            <a:avLst/>
-          </a:prstGeom>
-          <a:ln w="25400">
-            <a:solidFill>
-              <a:srgbClr val="8EDBD4"/>
-            </a:solidFill>
-          </a:ln>
-          <a:effectLst/>
-        </p:spPr>
-      </p:cxnSp>
-      <p:cxnSp>
-        <p:nvCxnSpPr>
-          <p:cNvPr id="54" name="C4-E37 line 52" descr="sci-ppt:o052"/>
-          <p:cNvCxnSpPr/>
-          <p:nvPr/>
-        </p:nvCxnSpPr>
-        <p:spPr>
-          <a:xfrm>
-            <a:off x="4834890" y="1514117"/>
-            <a:ext cx="76581" cy="37987"/>
-          </a:xfrm>
-          <a:prstGeom prst="line">
-            <a:avLst/>
-          </a:prstGeom>
-          <a:ln w="25400">
-            <a:solidFill>
-              <a:srgbClr val="8EDBD4"/>
-            </a:solidFill>
-          </a:ln>
-          <a:effectLst/>
-        </p:spPr>
-      </p:cxnSp>
-      <p:cxnSp>
-        <p:nvCxnSpPr>
-          <p:cNvPr id="55" name="C4-E37 line 53" descr="sci-ppt:o053"/>
-          <p:cNvCxnSpPr/>
-          <p:nvPr/>
-        </p:nvCxnSpPr>
-        <p:spPr>
-          <a:xfrm>
-            <a:off x="4911471" y="1552104"/>
-            <a:ext cx="76581" cy="40991"/>
-          </a:xfrm>
-          <a:prstGeom prst="line">
-            <a:avLst/>
-          </a:prstGeom>
-          <a:ln w="25400">
-            <a:solidFill>
-              <a:srgbClr val="8EDBD4"/>
-            </a:solidFill>
-          </a:ln>
-          <a:effectLst/>
-        </p:spPr>
-      </p:cxnSp>
-      <p:cxnSp>
-        <p:nvCxnSpPr>
-          <p:cNvPr id="56" name="C4-E37 line 54" descr="sci-ppt:o054"/>
-          <p:cNvCxnSpPr/>
-          <p:nvPr/>
-        </p:nvCxnSpPr>
-        <p:spPr>
-          <a:xfrm>
-            <a:off x="4988052" y="1593095"/>
-            <a:ext cx="76581" cy="43826"/>
-          </a:xfrm>
-          <a:prstGeom prst="line">
-            <a:avLst/>
-          </a:prstGeom>
-          <a:ln w="25400">
-            <a:solidFill>
-              <a:srgbClr val="8EDBD4"/>
-            </a:solidFill>
-          </a:ln>
-          <a:effectLst/>
-        </p:spPr>
-      </p:cxnSp>
-      <p:cxnSp>
-        <p:nvCxnSpPr>
-          <p:cNvPr id="57" name="C4-E37 line 55" descr="sci-ppt:o055"/>
-          <p:cNvCxnSpPr/>
-          <p:nvPr/>
-        </p:nvCxnSpPr>
-        <p:spPr>
-          <a:xfrm>
-            <a:off x="5064633" y="1636921"/>
-            <a:ext cx="76581" cy="46479"/>
-          </a:xfrm>
-          <a:prstGeom prst="line">
-            <a:avLst/>
-          </a:prstGeom>
-          <a:ln w="25400">
-            <a:solidFill>
-              <a:srgbClr val="8EDBD4"/>
-            </a:solidFill>
-          </a:ln>
-          <a:effectLst/>
-        </p:spPr>
-      </p:cxnSp>
-      <p:cxnSp>
-        <p:nvCxnSpPr>
-          <p:cNvPr id="58" name="C4-E37 line 56" descr="sci-ppt:o056"/>
-          <p:cNvCxnSpPr/>
-          <p:nvPr/>
-        </p:nvCxnSpPr>
-        <p:spPr>
-          <a:xfrm>
-            <a:off x="5141214" y="1683400"/>
-            <a:ext cx="76581" cy="48937"/>
-          </a:xfrm>
-          <a:prstGeom prst="line">
-            <a:avLst/>
-          </a:prstGeom>
-          <a:ln w="25400">
-            <a:solidFill>
-              <a:srgbClr val="8EDBD4"/>
-            </a:solidFill>
-          </a:ln>
-          <a:effectLst/>
-        </p:spPr>
-      </p:cxnSp>
-      <p:cxnSp>
-        <p:nvCxnSpPr>
-          <p:cNvPr id="59" name="C4-E37 line 57" descr="sci-ppt:o057"/>
-          <p:cNvCxnSpPr/>
-          <p:nvPr/>
-        </p:nvCxnSpPr>
-        <p:spPr>
-          <a:xfrm>
-            <a:off x="5217795" y="1732337"/>
-            <a:ext cx="76580" cy="51181"/>
-          </a:xfrm>
-          <a:prstGeom prst="line">
-            <a:avLst/>
-          </a:prstGeom>
-          <a:ln w="25400">
-            <a:solidFill>
-              <a:srgbClr val="8EDBD4"/>
-            </a:solidFill>
-          </a:ln>
-          <a:effectLst/>
-        </p:spPr>
-      </p:cxnSp>
-      <p:cxnSp>
-        <p:nvCxnSpPr>
-          <p:cNvPr id="60" name="C4-E37 line 58" descr="sci-ppt:o058"/>
-          <p:cNvCxnSpPr/>
-          <p:nvPr/>
-        </p:nvCxnSpPr>
-        <p:spPr>
-          <a:xfrm>
-            <a:off x="5294375" y="1783518"/>
-            <a:ext cx="76582" cy="53202"/>
-          </a:xfrm>
-          <a:prstGeom prst="line">
-            <a:avLst/>
-          </a:prstGeom>
-          <a:ln w="25400">
-            <a:solidFill>
-              <a:srgbClr val="8EDBD4"/>
-            </a:solidFill>
-          </a:ln>
-          <a:effectLst/>
-        </p:spPr>
-      </p:cxnSp>
-      <p:cxnSp>
-        <p:nvCxnSpPr>
-          <p:cNvPr id="61" name="C4-E37 line 59" descr="sci-ppt:o059"/>
-          <p:cNvCxnSpPr/>
-          <p:nvPr/>
-        </p:nvCxnSpPr>
-        <p:spPr>
-          <a:xfrm>
-            <a:off x="5370957" y="1836720"/>
-            <a:ext cx="76581" cy="54981"/>
-          </a:xfrm>
-          <a:prstGeom prst="line">
-            <a:avLst/>
-          </a:prstGeom>
-          <a:ln w="25400">
-            <a:solidFill>
-              <a:srgbClr val="8EDBD4"/>
-            </a:solidFill>
-          </a:ln>
-          <a:effectLst/>
-        </p:spPr>
-      </p:cxnSp>
-      <p:cxnSp>
-        <p:nvCxnSpPr>
-          <p:cNvPr id="62" name="C4-E37 line 60" descr="sci-ppt:o060"/>
-          <p:cNvCxnSpPr/>
-          <p:nvPr/>
-        </p:nvCxnSpPr>
-        <p:spPr>
-          <a:xfrm>
-            <a:off x="5447538" y="1891701"/>
-            <a:ext cx="76581" cy="56504"/>
-          </a:xfrm>
-          <a:prstGeom prst="line">
-            <a:avLst/>
-          </a:prstGeom>
-          <a:ln w="25400">
-            <a:solidFill>
-              <a:srgbClr val="8EDBD4"/>
-            </a:solidFill>
-          </a:ln>
-          <a:effectLst/>
-        </p:spPr>
-      </p:cxnSp>
-      <p:cxnSp>
-        <p:nvCxnSpPr>
-          <p:cNvPr id="63" name="C4-E37 line 61" descr="sci-ppt:o061"/>
-          <p:cNvCxnSpPr/>
-          <p:nvPr/>
-        </p:nvCxnSpPr>
-        <p:spPr>
-          <a:xfrm>
-            <a:off x="5524119" y="1948205"/>
-            <a:ext cx="76581" cy="57760"/>
-          </a:xfrm>
-          <a:prstGeom prst="line">
-            <a:avLst/>
-          </a:prstGeom>
-          <a:ln w="25400">
-            <a:solidFill>
-              <a:srgbClr val="8EDBD4"/>
-            </a:solidFill>
-          </a:ln>
-          <a:effectLst/>
-        </p:spPr>
-      </p:cxnSp>
-      <p:cxnSp>
-        <p:nvCxnSpPr>
-          <p:cNvPr id="64" name="C4-E37 line 62" descr="sci-ppt:o062"/>
-          <p:cNvCxnSpPr/>
-          <p:nvPr/>
-        </p:nvCxnSpPr>
-        <p:spPr>
-          <a:xfrm>
-            <a:off x="5600700" y="2005965"/>
-            <a:ext cx="76581" cy="58729"/>
-          </a:xfrm>
-          <a:prstGeom prst="line">
-            <a:avLst/>
-          </a:prstGeom>
-          <a:ln w="25400">
-            <a:solidFill>
-              <a:srgbClr val="8EDBD4"/>
-            </a:solidFill>
-          </a:ln>
-          <a:effectLst/>
-        </p:spPr>
-      </p:cxnSp>
-      <p:cxnSp>
-        <p:nvCxnSpPr>
-          <p:cNvPr id="65" name="C4-E37 line 63" descr="sci-ppt:o063"/>
-          <p:cNvCxnSpPr/>
-          <p:nvPr/>
-        </p:nvCxnSpPr>
-        <p:spPr>
-          <a:xfrm>
-            <a:off x="5677281" y="2064694"/>
-            <a:ext cx="76581" cy="59401"/>
-          </a:xfrm>
-          <a:prstGeom prst="line">
-            <a:avLst/>
-          </a:prstGeom>
-          <a:ln w="25400">
-            <a:solidFill>
-              <a:srgbClr val="8EDBD4"/>
-            </a:solidFill>
-          </a:ln>
-          <a:effectLst/>
-        </p:spPr>
-      </p:cxnSp>
-      <p:cxnSp>
-        <p:nvCxnSpPr>
-          <p:cNvPr id="66" name="C4-E37 line 64" descr="sci-ppt:o064"/>
-          <p:cNvCxnSpPr/>
-          <p:nvPr/>
-        </p:nvCxnSpPr>
-        <p:spPr>
-          <a:xfrm>
-            <a:off x="5753862" y="2124095"/>
-            <a:ext cx="76581" cy="59760"/>
-          </a:xfrm>
-          <a:prstGeom prst="line">
-            <a:avLst/>
-          </a:prstGeom>
-          <a:ln w="25400">
-            <a:solidFill>
-              <a:srgbClr val="8EDBD4"/>
-            </a:solidFill>
-          </a:ln>
-          <a:effectLst/>
-        </p:spPr>
-      </p:cxnSp>
-      <p:cxnSp>
-        <p:nvCxnSpPr>
-          <p:cNvPr id="67" name="C4-E37 line 65" descr="sci-ppt:o065"/>
-          <p:cNvCxnSpPr/>
-          <p:nvPr/>
-        </p:nvCxnSpPr>
-        <p:spPr>
-          <a:xfrm>
-            <a:off x="5830443" y="2183855"/>
-            <a:ext cx="76581" cy="59789"/>
-          </a:xfrm>
-          <a:prstGeom prst="line">
-            <a:avLst/>
-          </a:prstGeom>
-          <a:ln w="25400">
-            <a:solidFill>
-              <a:srgbClr val="8EDBD4"/>
-            </a:solidFill>
-          </a:ln>
-          <a:effectLst/>
-        </p:spPr>
-      </p:cxnSp>
-      <p:cxnSp>
-        <p:nvCxnSpPr>
-          <p:cNvPr id="68" name="C4-E37 line 66" descr="sci-ppt:o066"/>
-          <p:cNvCxnSpPr/>
-          <p:nvPr/>
-        </p:nvCxnSpPr>
-        <p:spPr>
-          <a:xfrm>
-            <a:off x="5907024" y="2243644"/>
-            <a:ext cx="76580" cy="59478"/>
-          </a:xfrm>
-          <a:prstGeom prst="line">
-            <a:avLst/>
-          </a:prstGeom>
-          <a:ln w="25400">
-            <a:solidFill>
-              <a:srgbClr val="8EDBD4"/>
-            </a:solidFill>
-          </a:ln>
-          <a:effectLst/>
-        </p:spPr>
-      </p:cxnSp>
-      <p:cxnSp>
-        <p:nvCxnSpPr>
-          <p:cNvPr id="69" name="C4-E37 line 67" descr="sci-ppt:o067"/>
-          <p:cNvCxnSpPr/>
-          <p:nvPr/>
-        </p:nvCxnSpPr>
-        <p:spPr>
-          <a:xfrm>
-            <a:off x="5983604" y="2303122"/>
-            <a:ext cx="76582" cy="58809"/>
-          </a:xfrm>
-          <a:prstGeom prst="line">
-            <a:avLst/>
-          </a:prstGeom>
-          <a:ln w="25400">
-            <a:solidFill>
-              <a:srgbClr val="8EDBD4"/>
-            </a:solidFill>
-          </a:ln>
-          <a:effectLst/>
-        </p:spPr>
-      </p:cxnSp>
-      <p:cxnSp>
-        <p:nvCxnSpPr>
-          <p:cNvPr id="70" name="C4-E37 line 68" descr="sci-ppt:o068"/>
-          <p:cNvCxnSpPr/>
-          <p:nvPr/>
-        </p:nvCxnSpPr>
-        <p:spPr>
-          <a:xfrm>
-            <a:off x="6060186" y="2361931"/>
-            <a:ext cx="76581" cy="57767"/>
-          </a:xfrm>
-          <a:prstGeom prst="line">
-            <a:avLst/>
-          </a:prstGeom>
-          <a:ln w="25400">
-            <a:solidFill>
-              <a:srgbClr val="8EDBD4"/>
-            </a:solidFill>
-          </a:ln>
-          <a:effectLst/>
-        </p:spPr>
-      </p:cxnSp>
-      <p:cxnSp>
-        <p:nvCxnSpPr>
-          <p:cNvPr id="71" name="C4-E37 line 69" descr="sci-ppt:o069"/>
-          <p:cNvCxnSpPr/>
-          <p:nvPr/>
-        </p:nvCxnSpPr>
-        <p:spPr>
-          <a:xfrm>
-            <a:off x="6136767" y="2419698"/>
-            <a:ext cx="76581" cy="56341"/>
-          </a:xfrm>
-          <a:prstGeom prst="line">
-            <a:avLst/>
-          </a:prstGeom>
-          <a:ln w="25400">
-            <a:solidFill>
-              <a:srgbClr val="8EDBD4"/>
-            </a:solidFill>
-          </a:ln>
-          <a:effectLst/>
-        </p:spPr>
-      </p:cxnSp>
-      <p:cxnSp>
-        <p:nvCxnSpPr>
-          <p:cNvPr id="72" name="C4-E37 line 70" descr="sci-ppt:o070"/>
-          <p:cNvCxnSpPr/>
-          <p:nvPr/>
-        </p:nvCxnSpPr>
-        <p:spPr>
-          <a:xfrm>
-            <a:off x="6213348" y="2476039"/>
-            <a:ext cx="76581" cy="54513"/>
-          </a:xfrm>
-          <a:prstGeom prst="line">
-            <a:avLst/>
-          </a:prstGeom>
-          <a:ln w="25400">
-            <a:solidFill>
-              <a:srgbClr val="8EDBD4"/>
-            </a:solidFill>
-          </a:ln>
-          <a:effectLst/>
-        </p:spPr>
-      </p:cxnSp>
-      <p:cxnSp>
-        <p:nvCxnSpPr>
-          <p:cNvPr id="73" name="C4-E37 line 71" descr="sci-ppt:o071"/>
-          <p:cNvCxnSpPr/>
-          <p:nvPr/>
-        </p:nvCxnSpPr>
-        <p:spPr>
-          <a:xfrm>
-            <a:off x="6289929" y="2530552"/>
-            <a:ext cx="76581" cy="52270"/>
-          </a:xfrm>
-          <a:prstGeom prst="line">
-            <a:avLst/>
-          </a:prstGeom>
-          <a:ln w="25400">
-            <a:solidFill>
-              <a:srgbClr val="8EDBD4"/>
-            </a:solidFill>
-          </a:ln>
-          <a:effectLst/>
-        </p:spPr>
-      </p:cxnSp>
-      <p:cxnSp>
-        <p:nvCxnSpPr>
-          <p:cNvPr id="74" name="C4-E37 line 72" descr="sci-ppt:o072"/>
-          <p:cNvCxnSpPr/>
-          <p:nvPr/>
-        </p:nvCxnSpPr>
-        <p:spPr>
-          <a:xfrm>
-            <a:off x="6366510" y="2582822"/>
-            <a:ext cx="76581" cy="49597"/>
-          </a:xfrm>
-          <a:prstGeom prst="line">
-            <a:avLst/>
-          </a:prstGeom>
-          <a:ln w="25400">
-            <a:solidFill>
-              <a:srgbClr val="8EDBD4"/>
-            </a:solidFill>
-          </a:ln>
-          <a:effectLst/>
-        </p:spPr>
-      </p:cxnSp>
-      <p:cxnSp>
-        <p:nvCxnSpPr>
-          <p:cNvPr id="75" name="C4-E37 line 73" descr="sci-ppt:o073"/>
-          <p:cNvCxnSpPr/>
-          <p:nvPr/>
-        </p:nvCxnSpPr>
-        <p:spPr>
-          <a:xfrm>
-            <a:off x="6443091" y="2632419"/>
-            <a:ext cx="76581" cy="46480"/>
-          </a:xfrm>
-          <a:prstGeom prst="line">
-            <a:avLst/>
-          </a:prstGeom>
-          <a:ln w="25400">
-            <a:solidFill>
-              <a:srgbClr val="8EDBD4"/>
-            </a:solidFill>
-          </a:ln>
-          <a:effectLst/>
-        </p:spPr>
-      </p:cxnSp>
-      <p:cxnSp>
-        <p:nvCxnSpPr>
-          <p:cNvPr id="76" name="C4-E37 line 74" descr="sci-ppt:o074"/>
-          <p:cNvCxnSpPr/>
-          <p:nvPr/>
-        </p:nvCxnSpPr>
-        <p:spPr>
-          <a:xfrm>
-            <a:off x="6519672" y="2678899"/>
-            <a:ext cx="76581" cy="42903"/>
-          </a:xfrm>
-          <a:prstGeom prst="line">
-            <a:avLst/>
-          </a:prstGeom>
-          <a:ln w="25400">
-            <a:solidFill>
-              <a:srgbClr val="8EDBD4"/>
-            </a:solidFill>
-          </a:ln>
-          <a:effectLst/>
-        </p:spPr>
-      </p:cxnSp>
-      <p:cxnSp>
-        <p:nvCxnSpPr>
-          <p:cNvPr id="77" name="C4-E37 line 75" descr="sci-ppt:o075"/>
-          <p:cNvCxnSpPr/>
-          <p:nvPr/>
-        </p:nvCxnSpPr>
-        <p:spPr>
-          <a:xfrm>
-            <a:off x="6596253" y="2721802"/>
-            <a:ext cx="76580" cy="38853"/>
-          </a:xfrm>
-          <a:prstGeom prst="line">
-            <a:avLst/>
-          </a:prstGeom>
-          <a:ln w="25400">
-            <a:solidFill>
-              <a:srgbClr val="8EDBD4"/>
-            </a:solidFill>
-          </a:ln>
-          <a:effectLst/>
-        </p:spPr>
-      </p:cxnSp>
-      <p:cxnSp>
-        <p:nvCxnSpPr>
-          <p:cNvPr id="78" name="C4-E37 line 76" descr="sci-ppt:o076"/>
-          <p:cNvCxnSpPr/>
-          <p:nvPr/>
-        </p:nvCxnSpPr>
-        <p:spPr>
-          <a:xfrm>
-            <a:off x="6672833" y="2760655"/>
-            <a:ext cx="76582" cy="34314"/>
-          </a:xfrm>
-          <a:prstGeom prst="line">
-            <a:avLst/>
-          </a:prstGeom>
-          <a:ln w="25400">
-            <a:solidFill>
-              <a:srgbClr val="8EDBD4"/>
-            </a:solidFill>
-          </a:ln>
-          <a:effectLst/>
-        </p:spPr>
-      </p:cxnSp>
-      <p:cxnSp>
-        <p:nvCxnSpPr>
-          <p:cNvPr id="79" name="C4-E37 line 77" descr="sci-ppt:o077"/>
-          <p:cNvCxnSpPr/>
-          <p:nvPr/>
-        </p:nvCxnSpPr>
-        <p:spPr>
-          <a:xfrm>
-            <a:off x="6749415" y="2794969"/>
-            <a:ext cx="76581" cy="29274"/>
-          </a:xfrm>
-          <a:prstGeom prst="line">
-            <a:avLst/>
-          </a:prstGeom>
-          <a:ln w="25400">
-            <a:solidFill>
-              <a:srgbClr val="8EDBD4"/>
-            </a:solidFill>
-          </a:ln>
-          <a:effectLst/>
-        </p:spPr>
-      </p:cxnSp>
-      <p:cxnSp>
-        <p:nvCxnSpPr>
-          <p:cNvPr id="80" name="C4-E37 line 78" descr="sci-ppt:o078"/>
-          <p:cNvCxnSpPr/>
-          <p:nvPr/>
-        </p:nvCxnSpPr>
-        <p:spPr>
-          <a:xfrm>
-            <a:off x="6825996" y="2824243"/>
-            <a:ext cx="76581" cy="23715"/>
-          </a:xfrm>
-          <a:prstGeom prst="line">
-            <a:avLst/>
-          </a:prstGeom>
-          <a:ln w="25400">
-            <a:solidFill>
-              <a:srgbClr val="8EDBD4"/>
-            </a:solidFill>
-          </a:ln>
-          <a:effectLst/>
-        </p:spPr>
-      </p:cxnSp>
-      <p:cxnSp>
-        <p:nvCxnSpPr>
-          <p:cNvPr id="81" name="C4-E37 line 79" descr="sci-ppt:o079"/>
-          <p:cNvCxnSpPr/>
-          <p:nvPr/>
-        </p:nvCxnSpPr>
-        <p:spPr>
-          <a:xfrm>
-            <a:off x="6902577" y="2847958"/>
-            <a:ext cx="76581" cy="17624"/>
-          </a:xfrm>
-          <a:prstGeom prst="line">
-            <a:avLst/>
-          </a:prstGeom>
-          <a:ln w="25400">
-            <a:solidFill>
-              <a:srgbClr val="8EDBD4"/>
-            </a:solidFill>
-          </a:ln>
-          <a:effectLst/>
-        </p:spPr>
-      </p:cxnSp>
-      <p:cxnSp>
-        <p:nvCxnSpPr>
-          <p:cNvPr id="82" name="C4-E37 line 80" descr="sci-ppt:o080"/>
-          <p:cNvCxnSpPr/>
-          <p:nvPr/>
-        </p:nvCxnSpPr>
-        <p:spPr>
-          <a:xfrm>
-            <a:off x="6979158" y="2865582"/>
-            <a:ext cx="76581" cy="10988"/>
-          </a:xfrm>
-          <a:prstGeom prst="line">
-            <a:avLst/>
-          </a:prstGeom>
-          <a:ln w="25400">
-            <a:solidFill>
-              <a:srgbClr val="8EDBD4"/>
-            </a:solidFill>
-          </a:ln>
-          <a:effectLst/>
-        </p:spPr>
-      </p:cxnSp>
-      <p:cxnSp>
-        <p:nvCxnSpPr>
-          <p:cNvPr id="83" name="C4-E37 line 81" descr="sci-ppt:o081"/>
-          <p:cNvCxnSpPr/>
-          <p:nvPr/>
-        </p:nvCxnSpPr>
-        <p:spPr>
-          <a:xfrm>
-            <a:off x="7055739" y="2876570"/>
-            <a:ext cx="76581" cy="3790"/>
-          </a:xfrm>
-          <a:prstGeom prst="line">
-            <a:avLst/>
-          </a:prstGeom>
-          <a:ln w="25400">
-            <a:solidFill>
-              <a:srgbClr val="8EDBD4"/>
-            </a:solidFill>
-          </a:ln>
-          <a:effectLst/>
-        </p:spPr>
-      </p:cxnSp>
-      <p:sp>
-        <p:nvSpPr>
-          <p:cNvPr id="84" name="C4-E37 rect 82" descr="sci-ppt:o082"/>
-          <p:cNvSpPr/>
-          <p:nvPr/>
-        </p:nvSpPr>
-        <p:spPr>
-          <a:xfrm>
-            <a:off x="777240" y="2651760"/>
-            <a:ext cx="274320" cy="457200"/>
-          </a:xfrm>
-          <a:prstGeom prst="rect">
-            <a:avLst/>
-          </a:prstGeom>
-          <a:solidFill>
-            <a:srgbClr val="213E4B"/>
-          </a:solidFill>
-          <a:ln w="19050">
-            <a:solidFill>
-              <a:srgbClr val="B4C7D2"/>
-            </a:solidFill>
-          </a:ln>
-          <a:effectLst/>
-        </p:spPr>
         <p:txBody>
           <a:bodyPr rtlCol="0" anchor="ctr"/>
           <a:lstStyle/>
@@ -4952,70 +4890,14 @@
       </p:sp>
       <p:sp>
         <p:nvSpPr>
-          <p:cNvPr id="85" name="C4-E37 rect 83" descr="sci-ppt:o083"/>
-          <p:cNvSpPr/>
-          <p:nvPr/>
-        </p:nvSpPr>
-        <p:spPr>
-          <a:xfrm>
-            <a:off x="7086600" y="2651760"/>
-            <a:ext cx="274320" cy="457200"/>
-          </a:xfrm>
-          <a:prstGeom prst="rect">
-            <a:avLst/>
-          </a:prstGeom>
-          <a:solidFill>
-            <a:srgbClr val="213E4B"/>
-          </a:solidFill>
-          <a:ln w="19050">
-            <a:solidFill>
-              <a:srgbClr val="B4C7D2"/>
-            </a:solidFill>
-          </a:ln>
-          <a:effectLst/>
-        </p:spPr>
-        <p:txBody>
-          <a:bodyPr rtlCol="0" anchor="ctr"/>
-          <a:lstStyle/>
-          <a:p>
-            <a:pPr algn="ctr"/>
-          </a:p>
-        </p:txBody>
-      </p:sp>
-      <p:cxnSp>
-        <p:nvCxnSpPr>
-          <p:cNvPr id="86" name="C4-E37 arrow 84" descr="sci-ppt:o084"/>
-          <p:cNvCxnSpPr/>
-          <p:nvPr/>
-        </p:nvCxnSpPr>
-        <p:spPr>
-          <a:xfrm flipV="1">
-            <a:off x="4069080" y="1371600"/>
-            <a:ext cx="0" cy="1463040"/>
-          </a:xfrm>
-          <a:prstGeom prst="line">
-            <a:avLst/>
-          </a:prstGeom>
-          <a:ln w="25400">
-            <a:solidFill>
-              <a:srgbClr val="8EDBD4"/>
-            </a:solidFill>
-            <a:headEnd type="none" w="med" len="med"/>
-            <a:tailEnd type="triangle" w="med" len="med"/>
-          </a:ln>
-          <a:effectLst/>
-        </p:spPr>
-      </p:cxnSp>
-      <p:sp>
-        <p:nvSpPr>
-          <p:cNvPr id="87" name="C4-E37 text 85" descr="sci-ppt:o085"/>
+          <p:cNvPr id="47" name="C4-E37 text 45" descr="sci-ppt:o045"/>
           <p:cNvSpPr txBox="1"/>
           <p:nvPr/>
         </p:nvSpPr>
         <p:spPr>
           <a:xfrm>
-            <a:off x="4206240" y="1920240"/>
-            <a:ext cx="2560320" cy="411480"/>
+            <a:off x="9162288" y="1426464"/>
+            <a:ext cx="2569463" cy="247142"/>
           </a:xfrm>
           <a:prstGeom prst="rect">
             <a:avLst/>
@@ -5024,7 +4906,7 @@
           <a:effectLst/>
         </p:spPr>
         <p:txBody>
-          <a:bodyPr wrap="square" lIns="27432" rIns="27432" tIns="18288" bIns="18288" anchor="ctr">
+          <a:bodyPr wrap="none" lIns="18288" rIns="18288" tIns="18288" bIns="18288" anchor="t">
             <a:spAutoFit/>
           </a:bodyPr>
           <a:lstStyle/>
@@ -5035,99 +4917,67 @@
               </a:spcAft>
             </a:pPr>
             <a:r>
-              <a:rPr sz="1800" b="0" i="0">
+              <a:rPr sz="1300" b="1" i="0">
+                <a:solidFill>
+                  <a:srgbClr val="8EDBD4"/>
+                </a:solidFill>
+                <a:latin typeface="Arial"/>
+              </a:rPr>
+              <a:t>Formulas</a:t>
+            </a:r>
+          </a:p>
+        </p:txBody>
+      </p:sp>
+      <p:sp>
+        <p:nvSpPr>
+          <p:cNvPr id="48" name="C4-E37 text 46" descr="sci-ppt:o046"/>
+          <p:cNvSpPr txBox="1"/>
+          <p:nvPr/>
+        </p:nvSpPr>
+        <p:spPr>
+          <a:xfrm>
+            <a:off x="9144000" y="1828800"/>
+            <a:ext cx="2606040" cy="216153"/>
+          </a:xfrm>
+          <a:prstGeom prst="rect">
+            <a:avLst/>
+          </a:prstGeom>
+          <a:noFill/>
+          <a:effectLst/>
+        </p:spPr>
+        <p:txBody>
+          <a:bodyPr wrap="none" lIns="18288" rIns="18288" tIns="18288" bIns="18288" anchor="t">
+            <a:spAutoFit/>
+          </a:bodyPr>
+          <a:lstStyle/>
+          <a:p>
+            <a:pPr algn="l">
+              <a:spcAft>
+                <a:spcPts val="0"/>
+              </a:spcAft>
+            </a:pPr>
+            <a:r>
+              <a:rPr sz="1100" b="1" i="0">
                 <a:solidFill>
                   <a:srgbClr val="E7F0F3"/>
                 </a:solidFill>
                 <a:latin typeface="Arial"/>
               </a:rPr>
-              <a:t>w(r) ↑</a:t>
-            </a:r>
-          </a:p>
-        </p:txBody>
-      </p:sp>
-      <p:cxnSp>
-        <p:nvCxnSpPr>
-          <p:cNvPr id="88" name="C4-E37 arrow 86" descr="sci-ppt:o086"/>
-          <p:cNvCxnSpPr/>
-          <p:nvPr/>
-        </p:nvCxnSpPr>
-        <p:spPr>
-          <a:xfrm flipV="1">
-            <a:off x="2286000" y="2971800"/>
-            <a:ext cx="0" cy="594360"/>
-          </a:xfrm>
-          <a:prstGeom prst="line">
-            <a:avLst/>
-          </a:prstGeom>
-          <a:ln w="25400">
-            <a:solidFill>
-              <a:srgbClr val="8EDBD4"/>
-            </a:solidFill>
-            <a:headEnd type="none" w="med" len="med"/>
-            <a:tailEnd type="triangle" w="med" len="med"/>
-          </a:ln>
-          <a:effectLst/>
-        </p:spPr>
-      </p:cxnSp>
-      <p:cxnSp>
-        <p:nvCxnSpPr>
-          <p:cNvPr id="89" name="C4-E37 arrow 87" descr="sci-ppt:o087"/>
-          <p:cNvCxnSpPr/>
-          <p:nvPr/>
-        </p:nvCxnSpPr>
-        <p:spPr>
-          <a:xfrm flipV="1">
-            <a:off x="4069080" y="2971800"/>
-            <a:ext cx="0" cy="594360"/>
-          </a:xfrm>
-          <a:prstGeom prst="line">
-            <a:avLst/>
-          </a:prstGeom>
-          <a:ln w="25400">
-            <a:solidFill>
-              <a:srgbClr val="8EDBD4"/>
-            </a:solidFill>
-            <a:headEnd type="none" w="med" len="med"/>
-            <a:tailEnd type="triangle" w="med" len="med"/>
-          </a:ln>
-          <a:effectLst/>
-        </p:spPr>
-      </p:cxnSp>
-      <p:cxnSp>
-        <p:nvCxnSpPr>
-          <p:cNvPr id="90" name="C4-E37 arrow 88" descr="sci-ppt:o088"/>
-          <p:cNvCxnSpPr/>
-          <p:nvPr/>
-        </p:nvCxnSpPr>
-        <p:spPr>
-          <a:xfrm flipV="1">
-            <a:off x="5852160" y="2971800"/>
-            <a:ext cx="0" cy="594360"/>
-          </a:xfrm>
-          <a:prstGeom prst="line">
-            <a:avLst/>
-          </a:prstGeom>
-          <a:ln w="25400">
-            <a:solidFill>
-              <a:srgbClr val="8EDBD4"/>
-            </a:solidFill>
-            <a:headEnd type="none" w="med" len="med"/>
-            <a:tailEnd type="triangle" w="med" len="med"/>
-          </a:ln>
-          <a:effectLst/>
-        </p:spPr>
-      </p:cxnSp>
-      <p:sp>
-        <p:nvSpPr>
-          <p:cNvPr id="91" name="C4-E37 text 89" descr="sci-ppt:o089"/>
+              <a:t>w = p₀(b² − r²)² / (64 D_f)</a:t>
+            </a:r>
+          </a:p>
+        </p:txBody>
+      </p:sp>
+      <p:sp>
+        <p:nvSpPr>
+          <p:cNvPr id="49" name="C4-E37 text 47" descr="sci-ppt:o047"/>
           <p:cNvSpPr txBox="1"/>
           <p:nvPr/>
         </p:nvSpPr>
         <p:spPr>
           <a:xfrm>
-            <a:off x="2834640" y="3611880"/>
-            <a:ext cx="3657600" cy="274320"/>
+            <a:off x="9144000" y="2468880"/>
+            <a:ext cx="2606040" cy="216153"/>
           </a:xfrm>
           <a:prstGeom prst="rect">
             <a:avLst/>
@@ -5136,7 +4986,7 @@
           <a:effectLst/>
         </p:spPr>
         <p:txBody>
-          <a:bodyPr wrap="square" lIns="27432" rIns="27432" tIns="18288" bIns="18288" anchor="ctr">
+          <a:bodyPr wrap="none" lIns="18288" rIns="18288" tIns="18288" bIns="18288" anchor="t">
             <a:spAutoFit/>
           </a:bodyPr>
           <a:lstStyle/>
@@ -5147,49 +4997,27 @@
               </a:spcAft>
             </a:pPr>
             <a:r>
-              <a:rPr sz="1600" b="0" i="0">
+              <a:rPr sz="1100" b="1" i="0">
                 <a:solidFill>
                   <a:srgbClr val="E7F0F3"/>
                 </a:solidFill>
                 <a:latin typeface="Arial"/>
               </a:rPr>
-              <a:t>p₀: maintained pressure</a:t>
-            </a:r>
-          </a:p>
-        </p:txBody>
-      </p:sp>
-      <p:cxnSp>
-        <p:nvCxnSpPr>
-          <p:cNvPr id="92" name="C4-E37 line 90" descr="sci-ppt:o090"/>
-          <p:cNvCxnSpPr/>
-          <p:nvPr/>
-        </p:nvCxnSpPr>
-        <p:spPr>
-          <a:xfrm>
-            <a:off x="4069080" y="3200400"/>
-            <a:ext cx="3063240" cy="0"/>
-          </a:xfrm>
-          <a:prstGeom prst="line">
-            <a:avLst/>
-          </a:prstGeom>
-          <a:ln w="25400">
-            <a:solidFill>
-              <a:srgbClr val="8EDBD4"/>
-            </a:solidFill>
-          </a:ln>
-          <a:effectLst/>
-        </p:spPr>
-      </p:cxnSp>
-      <p:sp>
-        <p:nvSpPr>
-          <p:cNvPr id="93" name="C4-E37 text 91" descr="sci-ppt:o091"/>
+              <a:t>G = p₀²b⁴ / (128 D_f)</a:t>
+            </a:r>
+          </a:p>
+        </p:txBody>
+      </p:sp>
+      <p:sp>
+        <p:nvSpPr>
+          <p:cNvPr id="50" name="C4-E37 text 48" descr="sci-ppt:o048"/>
           <p:cNvSpPr txBox="1"/>
           <p:nvPr/>
         </p:nvSpPr>
         <p:spPr>
           <a:xfrm>
-            <a:off x="5486400" y="3246120"/>
-            <a:ext cx="914400" cy="274320"/>
+            <a:off x="9144000" y="3108960"/>
+            <a:ext cx="2606040" cy="216153"/>
           </a:xfrm>
           <a:prstGeom prst="rect">
             <a:avLst/>
@@ -5198,7 +5026,7 @@
           <a:effectLst/>
         </p:spPr>
         <p:txBody>
-          <a:bodyPr wrap="square" lIns="27432" rIns="27432" tIns="18288" bIns="18288" anchor="ctr">
+          <a:bodyPr wrap="none" lIns="18288" rIns="18288" tIns="18288" bIns="18288" anchor="t">
             <a:spAutoFit/>
           </a:bodyPr>
           <a:lstStyle/>
@@ -5209,81 +5037,67 @@
               </a:spcAft>
             </a:pPr>
             <a:r>
-              <a:rPr sz="1600" b="0" i="0">
+              <a:rPr sz="1100" b="1" i="0">
+                <a:solidFill>
+                  <a:srgbClr val="F2B880"/>
+                </a:solidFill>
+                <a:latin typeface="Arial"/>
+              </a:rPr>
+              <a:t>p₀,crit = √(128 D_f Γ) / b²</a:t>
+            </a:r>
+          </a:p>
+        </p:txBody>
+      </p:sp>
+      <p:sp>
+        <p:nvSpPr>
+          <p:cNvPr id="51" name="C4-E37 text 49" descr="sci-ppt:o049"/>
+          <p:cNvSpPr txBox="1"/>
+          <p:nvPr/>
+        </p:nvSpPr>
+        <p:spPr>
+          <a:xfrm>
+            <a:off x="914400" y="5486400"/>
+            <a:ext cx="10972800" cy="239395"/>
+          </a:xfrm>
+          <a:prstGeom prst="rect">
+            <a:avLst/>
+          </a:prstGeom>
+          <a:noFill/>
+          <a:effectLst/>
+        </p:spPr>
+        <p:txBody>
+          <a:bodyPr wrap="none" lIns="18288" rIns="18288" tIns="18288" bIns="18288" anchor="t">
+            <a:spAutoFit/>
+          </a:bodyPr>
+          <a:lstStyle/>
+          <a:p>
+            <a:pPr algn="l">
+              <a:spcAft>
+                <a:spcPts val="0"/>
+              </a:spcAft>
+            </a:pPr>
+            <a:r>
+              <a:rPr sz="1250" b="0" i="0">
                 <a:solidFill>
                   <a:srgbClr val="E7F0F3"/>
                 </a:solidFill>
                 <a:latin typeface="Arial"/>
               </a:rPr>
-              <a:t>b</a:t>
-            </a:r>
-          </a:p>
-        </p:txBody>
-      </p:sp>
-      <p:sp>
-        <p:nvSpPr>
-          <p:cNvPr id="94" name="C4-E37 ellipse 92" descr="sci-ppt:o092"/>
-          <p:cNvSpPr/>
-          <p:nvPr/>
-        </p:nvSpPr>
-        <p:spPr>
-          <a:xfrm>
-            <a:off x="8686800" y="1097280"/>
-            <a:ext cx="1920240" cy="1920240"/>
-          </a:xfrm>
-          <a:prstGeom prst="ellipse">
-            <a:avLst/>
-          </a:prstGeom>
-          <a:noFill/>
-          <a:ln w="19050">
-            <a:solidFill>
-              <a:srgbClr val="B4C7D2"/>
-            </a:solidFill>
-          </a:ln>
-          <a:effectLst/>
-        </p:spPr>
-        <p:txBody>
-          <a:bodyPr rtlCol="0" anchor="ctr"/>
-          <a:lstStyle/>
-          <a:p>
-            <a:pPr algn="ctr"/>
-          </a:p>
-        </p:txBody>
-      </p:sp>
-      <p:cxnSp>
-        <p:nvCxnSpPr>
-          <p:cNvPr id="95" name="C4-E37 arrow 93" descr="sci-ppt:o093"/>
-          <p:cNvCxnSpPr/>
-          <p:nvPr/>
-        </p:nvCxnSpPr>
-        <p:spPr>
-          <a:xfrm>
-            <a:off x="9646920" y="2057400"/>
-            <a:ext cx="960120" cy="0"/>
-          </a:xfrm>
-          <a:prstGeom prst="line">
-            <a:avLst/>
-          </a:prstGeom>
-          <a:ln w="25400">
-            <a:solidFill>
-              <a:srgbClr val="8EDBD4"/>
-            </a:solidFill>
-            <a:headEnd type="none" w="med" len="med"/>
-            <a:tailEnd type="triangle" w="med" len="med"/>
-          </a:ln>
-          <a:effectLst/>
-        </p:spPr>
-      </p:cxnSp>
-      <p:sp>
-        <p:nvSpPr>
-          <p:cNvPr id="96" name="C4-E37 text 94" descr="sci-ppt:o094"/>
+              <a:t>Defence 2: the 156 kPa threshold belongs to this plate, this clamp, this interface energy and a maintained-pressure source.</a:t>
+            </a:r>
+          </a:p>
+        </p:txBody>
+      </p:sp>
+      <p:sp>
+        <p:nvSpPr>
+          <p:cNvPr id="52" name="C4-E37 text 50" descr="sci-ppt:o050"/>
           <p:cNvSpPr txBox="1"/>
           <p:nvPr/>
         </p:nvSpPr>
         <p:spPr>
           <a:xfrm>
-            <a:off x="9875520" y="1645920"/>
-            <a:ext cx="914400" cy="274320"/>
+            <a:off x="914400" y="5943600"/>
+            <a:ext cx="10972800" cy="231648"/>
           </a:xfrm>
           <a:prstGeom prst="rect">
             <a:avLst/>
@@ -5292,7 +5106,7 @@
           <a:effectLst/>
         </p:spPr>
         <p:txBody>
-          <a:bodyPr wrap="square" lIns="27432" rIns="27432" tIns="18288" bIns="18288" anchor="ctr">
+          <a:bodyPr wrap="none" lIns="18288" rIns="18288" tIns="18288" bIns="18288" anchor="t">
             <a:spAutoFit/>
           </a:bodyPr>
           <a:lstStyle/>
@@ -5303,169 +5117,27 @@
               </a:spcAft>
             </a:pPr>
             <a:r>
-              <a:rPr sz="1700" b="0" i="0">
-                <a:solidFill>
-                  <a:srgbClr val="E7F0F3"/>
-                </a:solidFill>
-                <a:latin typeface="Arial"/>
-              </a:rPr>
-              <a:t>b</a:t>
-            </a:r>
-          </a:p>
-        </p:txBody>
-      </p:sp>
-      <p:sp>
-        <p:nvSpPr>
-          <p:cNvPr id="97" name="C4-E37 text 95" descr="sci-ppt:o095"/>
-          <p:cNvSpPr txBox="1"/>
-          <p:nvPr/>
-        </p:nvSpPr>
-        <p:spPr>
-          <a:xfrm>
-            <a:off x="8503920" y="3291840"/>
-            <a:ext cx="2743200" cy="365760"/>
-          </a:xfrm>
-          <a:prstGeom prst="rect">
-            <a:avLst/>
-          </a:prstGeom>
-          <a:noFill/>
-          <a:effectLst/>
-        </p:spPr>
-        <p:txBody>
-          <a:bodyPr wrap="square" lIns="27432" rIns="27432" tIns="18288" bIns="18288" anchor="ctr">
-            <a:spAutoFit/>
-          </a:bodyPr>
-          <a:lstStyle/>
-          <a:p>
-            <a:pPr algn="l">
-              <a:spcAft>
-                <a:spcPts val="0"/>
-              </a:spcAft>
-            </a:pPr>
-            <a:r>
-              <a:rPr sz="1800" b="0" i="0">
-                <a:solidFill>
-                  <a:srgbClr val="E7F0F3"/>
-                </a:solidFill>
-                <a:latin typeface="Arial"/>
-              </a:rPr>
-              <a:t>A_c = π b²</a:t>
-            </a:r>
-          </a:p>
-        </p:txBody>
-      </p:sp>
-      <p:sp>
-        <p:nvSpPr>
-          <p:cNvPr id="98" name="C4-E37 text 96" descr="sci-ppt:o096"/>
-          <p:cNvSpPr txBox="1"/>
-          <p:nvPr/>
-        </p:nvSpPr>
-        <p:spPr>
-          <a:xfrm>
-            <a:off x="685800" y="731520"/>
-            <a:ext cx="10972800" cy="365760"/>
-          </a:xfrm>
-          <a:prstGeom prst="rect">
-            <a:avLst/>
-          </a:prstGeom>
-          <a:noFill/>
-          <a:effectLst/>
-        </p:spPr>
-        <p:txBody>
-          <a:bodyPr wrap="square" lIns="27432" rIns="27432" tIns="18288" bIns="18288" anchor="ctr">
-            <a:spAutoFit/>
-          </a:bodyPr>
-          <a:lstStyle/>
-          <a:p>
-            <a:pPr algn="l">
-              <a:spcAft>
-                <a:spcPts val="0"/>
-              </a:spcAft>
-            </a:pPr>
-            <a:r>
-              <a:rPr sz="1800" b="0" i="0">
-                <a:solidFill>
-                  <a:srgbClr val="8EDBD4"/>
-                </a:solidFill>
-                <a:latin typeface="Arial"/>
-              </a:rPr>
-              <a:t>Clamped circular blister: w(b) = 0; w′(b) = 0; regular centre.</a:t>
-            </a:r>
-          </a:p>
-        </p:txBody>
-      </p:sp>
-      <p:cxnSp>
-        <p:nvCxnSpPr>
-          <p:cNvPr id="99" name="C4-E37 line 97" descr="sci-ppt:o097"/>
-          <p:cNvCxnSpPr/>
-          <p:nvPr/>
-        </p:nvCxnSpPr>
-        <p:spPr>
-          <a:xfrm>
-            <a:off x="274320" y="3977639"/>
-            <a:ext cx="11612880" cy="0"/>
-          </a:xfrm>
-          <a:prstGeom prst="line">
-            <a:avLst/>
-          </a:prstGeom>
-          <a:ln w="12700">
-            <a:solidFill>
-              <a:srgbClr val="405967"/>
-            </a:solidFill>
-          </a:ln>
-          <a:effectLst/>
-        </p:spPr>
-      </p:cxnSp>
-      <p:sp>
-        <p:nvSpPr>
-          <p:cNvPr id="100" name="C4-E37 text 98" descr="sci-ppt:o098"/>
-          <p:cNvSpPr txBox="1"/>
-          <p:nvPr/>
-        </p:nvSpPr>
-        <p:spPr>
-          <a:xfrm>
-            <a:off x="320040" y="4096512"/>
-            <a:ext cx="5715000" cy="246888"/>
-          </a:xfrm>
-          <a:prstGeom prst="rect">
-            <a:avLst/>
-          </a:prstGeom>
-          <a:noFill/>
-          <a:effectLst/>
-        </p:spPr>
-        <p:txBody>
-          <a:bodyPr wrap="square" lIns="27432" rIns="27432" tIns="18288" bIns="18288" anchor="ctr">
-            <a:spAutoFit/>
-          </a:bodyPr>
-          <a:lstStyle/>
-          <a:p>
-            <a:pPr algn="l">
-              <a:spcAft>
-                <a:spcPts val="0"/>
-              </a:spcAft>
-            </a:pPr>
-            <a:r>
-              <a:rPr sz="1150" b="0" i="0">
+              <a:rPr sz="1200" b="0" i="0">
                 <a:solidFill>
                   <a:srgbClr val="B4C7D2"/>
                 </a:solidFill>
                 <a:latin typeface="Arial"/>
               </a:rPr>
-              <a:t>• r, b — circular crack geometry</a:t>
-            </a:r>
-          </a:p>
-        </p:txBody>
-      </p:sp>
-      <p:sp>
-        <p:nvSpPr>
-          <p:cNvPr id="101" name="C4-E37 text 99" descr="sci-ppt:o099"/>
+              <a:t>Change the loading control (fixed volume) or the geometry and the threshold changes.</a:t>
+            </a:r>
+          </a:p>
+        </p:txBody>
+      </p:sp>
+      <p:sp>
+        <p:nvSpPr>
+          <p:cNvPr id="53" name="C4-E37 text 51" descr="sci-ppt:o051"/>
           <p:cNvSpPr txBox="1"/>
           <p:nvPr/>
         </p:nvSpPr>
         <p:spPr>
           <a:xfrm>
-            <a:off x="6217920" y="4096512"/>
-            <a:ext cx="5715000" cy="246888"/>
+            <a:off x="320040" y="6510528"/>
+            <a:ext cx="11521440" cy="200660"/>
           </a:xfrm>
           <a:prstGeom prst="rect">
             <a:avLst/>
@@ -5474,247 +5146,7 @@
           <a:effectLst/>
         </p:spPr>
         <p:txBody>
-          <a:bodyPr wrap="square" lIns="27432" rIns="27432" tIns="18288" bIns="18288" anchor="ctr">
-            <a:spAutoFit/>
-          </a:bodyPr>
-          <a:lstStyle/>
-          <a:p>
-            <a:pPr algn="l">
-              <a:spcAft>
-                <a:spcPts val="0"/>
-              </a:spcAft>
-            </a:pPr>
-            <a:r>
-              <a:rPr sz="1150" b="0" i="0">
-                <a:solidFill>
-                  <a:srgbClr val="B4C7D2"/>
-                </a:solidFill>
-                <a:latin typeface="Arial"/>
-              </a:rPr>
-              <a:t>• w(r) ↑ clamped profile</a:t>
-            </a:r>
-          </a:p>
-        </p:txBody>
-      </p:sp>
-      <p:sp>
-        <p:nvSpPr>
-          <p:cNvPr id="102" name="C4-E37 text 100" descr="sci-ppt:o100"/>
-          <p:cNvSpPr txBox="1"/>
-          <p:nvPr/>
-        </p:nvSpPr>
-        <p:spPr>
-          <a:xfrm>
-            <a:off x="320040" y="4329684"/>
-            <a:ext cx="5715000" cy="246888"/>
-          </a:xfrm>
-          <a:prstGeom prst="rect">
-            <a:avLst/>
-          </a:prstGeom>
-          <a:noFill/>
-          <a:effectLst/>
-        </p:spPr>
-        <p:txBody>
-          <a:bodyPr wrap="square" lIns="27432" rIns="27432" tIns="18288" bIns="18288" anchor="ctr">
-            <a:spAutoFit/>
-          </a:bodyPr>
-          <a:lstStyle/>
-          <a:p>
-            <a:pPr algn="l">
-              <a:spcAft>
-                <a:spcPts val="0"/>
-              </a:spcAft>
-            </a:pPr>
-            <a:r>
-              <a:rPr sz="1150" b="0" i="0">
-                <a:solidFill>
-                  <a:srgbClr val="B4C7D2"/>
-                </a:solidFill>
-                <a:latin typeface="Arial"/>
-              </a:rPr>
-              <a:t>• p₀ — uniform maintained pressure</a:t>
-            </a:r>
-          </a:p>
-        </p:txBody>
-      </p:sp>
-      <p:sp>
-        <p:nvSpPr>
-          <p:cNvPr id="103" name="C4-E37 text 101" descr="sci-ppt:o101"/>
-          <p:cNvSpPr txBox="1"/>
-          <p:nvPr/>
-        </p:nvSpPr>
-        <p:spPr>
-          <a:xfrm>
-            <a:off x="6217920" y="4329684"/>
-            <a:ext cx="5715000" cy="246888"/>
-          </a:xfrm>
-          <a:prstGeom prst="rect">
-            <a:avLst/>
-          </a:prstGeom>
-          <a:noFill/>
-          <a:effectLst/>
-        </p:spPr>
-        <p:txBody>
-          <a:bodyPr wrap="square" lIns="27432" rIns="27432" tIns="18288" bIns="18288" anchor="ctr">
-            <a:spAutoFit/>
-          </a:bodyPr>
-          <a:lstStyle/>
-          <a:p>
-            <a:pPr algn="l">
-              <a:spcAft>
-                <a:spcPts val="0"/>
-              </a:spcAft>
-            </a:pPr>
-            <a:r>
-              <a:rPr sz="1150" b="0" i="0">
-                <a:solidFill>
-                  <a:srgbClr val="B4C7D2"/>
-                </a:solidFill>
-                <a:latin typeface="Arial"/>
-              </a:rPr>
-              <a:t>• D_f — bending stiffness</a:t>
-            </a:r>
-          </a:p>
-        </p:txBody>
-      </p:sp>
-      <p:sp>
-        <p:nvSpPr>
-          <p:cNvPr id="104" name="C4-E37 text 102" descr="sci-ppt:o102"/>
-          <p:cNvSpPr txBox="1"/>
-          <p:nvPr/>
-        </p:nvSpPr>
-        <p:spPr>
-          <a:xfrm>
-            <a:off x="320040" y="4562856"/>
-            <a:ext cx="5715000" cy="246888"/>
-          </a:xfrm>
-          <a:prstGeom prst="rect">
-            <a:avLst/>
-          </a:prstGeom>
-          <a:noFill/>
-          <a:effectLst/>
-        </p:spPr>
-        <p:txBody>
-          <a:bodyPr wrap="square" lIns="27432" rIns="27432" tIns="18288" bIns="18288" anchor="ctr">
-            <a:spAutoFit/>
-          </a:bodyPr>
-          <a:lstStyle/>
-          <a:p>
-            <a:pPr algn="l">
-              <a:spcAft>
-                <a:spcPts val="0"/>
-              </a:spcAft>
-            </a:pPr>
-            <a:r>
-              <a:rPr sz="1150" b="0" i="0">
-                <a:solidFill>
-                  <a:srgbClr val="B4C7D2"/>
-                </a:solidFill>
-                <a:latin typeface="Arial"/>
-              </a:rPr>
-              <a:t>• Γ — fracture resistance</a:t>
-            </a:r>
-          </a:p>
-        </p:txBody>
-      </p:sp>
-      <p:sp>
-        <p:nvSpPr>
-          <p:cNvPr id="105" name="C4-E37 text 103" descr="sci-ppt:o103"/>
-          <p:cNvSpPr txBox="1"/>
-          <p:nvPr/>
-        </p:nvSpPr>
-        <p:spPr>
-          <a:xfrm>
-            <a:off x="6217920" y="4562856"/>
-            <a:ext cx="5715000" cy="246888"/>
-          </a:xfrm>
-          <a:prstGeom prst="rect">
-            <a:avLst/>
-          </a:prstGeom>
-          <a:noFill/>
-          <a:effectLst/>
-        </p:spPr>
-        <p:txBody>
-          <a:bodyPr wrap="square" lIns="27432" rIns="27432" tIns="18288" bIns="18288" anchor="ctr">
-            <a:spAutoFit/>
-          </a:bodyPr>
-          <a:lstStyle/>
-          <a:p>
-            <a:pPr algn="l">
-              <a:spcAft>
-                <a:spcPts val="0"/>
-              </a:spcAft>
-            </a:pPr>
-            <a:r>
-              <a:rPr sz="1150" b="0" i="0">
-                <a:solidFill>
-                  <a:srgbClr val="B4C7D2"/>
-                </a:solidFill>
-                <a:latin typeface="Arial"/>
-              </a:rPr>
-              <a:t>• G_p₀, p₀,crit — onset quantities</a:t>
-            </a:r>
-          </a:p>
-        </p:txBody>
-      </p:sp>
-      <p:sp>
-        <p:nvSpPr>
-          <p:cNvPr id="106" name="C4-E37 text 104" descr="sci-ppt:o104"/>
-          <p:cNvSpPr txBox="1"/>
-          <p:nvPr/>
-        </p:nvSpPr>
-        <p:spPr>
-          <a:xfrm>
-            <a:off x="320040" y="5596128"/>
-            <a:ext cx="11430000" cy="292608"/>
-          </a:xfrm>
-          <a:prstGeom prst="rect">
-            <a:avLst/>
-          </a:prstGeom>
-          <a:noFill/>
-          <a:effectLst/>
-        </p:spPr>
-        <p:txBody>
-          <a:bodyPr wrap="square" lIns="27432" rIns="27432" tIns="18288" bIns="18288" anchor="ctr">
-            <a:spAutoFit/>
-          </a:bodyPr>
-          <a:lstStyle/>
-          <a:p>
-            <a:pPr algn="l">
-              <a:spcAft>
-                <a:spcPts val="0"/>
-              </a:spcAft>
-            </a:pPr>
-            <a:r>
-              <a:rPr sz="1150" b="0" i="0">
-                <a:solidFill>
-                  <a:srgbClr val="8EDBD4"/>
-                </a:solidFill>
-                <a:latin typeface="Arial"/>
-              </a:rPr>
-              <a:t>A finite short jet is not a maintained pressure reservoir.</a:t>
-            </a:r>
-          </a:p>
-        </p:txBody>
-      </p:sp>
-      <p:sp>
-        <p:nvSpPr>
-          <p:cNvPr id="107" name="C4-E37 text 105" descr="sci-ppt:o105"/>
-          <p:cNvSpPr txBox="1"/>
-          <p:nvPr/>
-        </p:nvSpPr>
-        <p:spPr>
-          <a:xfrm>
-            <a:off x="320040" y="6473952"/>
-            <a:ext cx="11430000" cy="256032"/>
-          </a:xfrm>
-          <a:prstGeom prst="rect">
-            <a:avLst/>
-          </a:prstGeom>
-          <a:noFill/>
-          <a:effectLst/>
-        </p:spPr>
-        <p:txBody>
-          <a:bodyPr wrap="square" lIns="27432" rIns="27432" tIns="18288" bIns="18288" anchor="ctr">
+          <a:bodyPr wrap="none" lIns="18288" rIns="18288" tIns="18288" bIns="18288" anchor="t">
             <a:spAutoFit/>
           </a:bodyPr>
           <a:lstStyle/>
@@ -5731,7 +5163,7 @@
                 </a:solidFill>
                 <a:latin typeface="Arial"/>
               </a:rPr>
-              <a:t>Model schematic; geometry is not to scale.</a:t>
+              <a:t>Reference formulas of the Defence 2 answer: Eqs. C4-E16, E20, E21.</a:t>
             </a:r>
           </a:p>
         </p:txBody>
